--- a/recursion/Recursion.pptx
+++ b/recursion/Recursion.pptx
@@ -5,7 +5,7 @@
     <p:sldMasterId id="2147483648" r:id="rId4"/>
   </p:sldMasterIdLst>
   <p:notesMasterIdLst>
-    <p:notesMasterId r:id="rId17"/>
+    <p:notesMasterId r:id="rId18"/>
   </p:notesMasterIdLst>
   <p:sldIdLst>
     <p:sldId id="293" r:id="rId5"/>
@@ -17,9 +17,10 @@
     <p:sldId id="352" r:id="rId11"/>
     <p:sldId id="353" r:id="rId12"/>
     <p:sldId id="354" r:id="rId13"/>
-    <p:sldId id="355" r:id="rId14"/>
-    <p:sldId id="356" r:id="rId15"/>
-    <p:sldId id="358" r:id="rId16"/>
+    <p:sldId id="359" r:id="rId14"/>
+    <p:sldId id="355" r:id="rId15"/>
+    <p:sldId id="356" r:id="rId16"/>
+    <p:sldId id="358" r:id="rId17"/>
   </p:sldIdLst>
   <p:sldSz cx="12192000" cy="6858000"/>
   <p:notesSz cx="6858000" cy="9144000"/>
@@ -576,6 +577,114 @@
         <p:cNvPr id="1" name="">
           <a:extLst>
             <a:ext uri="{FF2B5EF4-FFF2-40B4-BE49-F238E27FC236}">
+              <a16:creationId xmlns:a16="http://schemas.microsoft.com/office/drawing/2014/main" id="{1F045E87-202C-5E9F-0B3F-26B3EE073BE8}"/>
+            </a:ext>
+          </a:extLst>
+        </p:cNvPr>
+        <p:cNvGrpSpPr/>
+        <p:nvPr/>
+      </p:nvGrpSpPr>
+      <p:grpSpPr>
+        <a:xfrm>
+          <a:off x="0" y="0"/>
+          <a:ext cx="0" cy="0"/>
+          <a:chOff x="0" y="0"/>
+          <a:chExt cx="0" cy="0"/>
+        </a:xfrm>
+      </p:grpSpPr>
+      <p:sp>
+        <p:nvSpPr>
+          <p:cNvPr id="2" name="Slide Image Placeholder 1">
+            <a:extLst>
+              <a:ext uri="{FF2B5EF4-FFF2-40B4-BE49-F238E27FC236}">
+                <a16:creationId xmlns:a16="http://schemas.microsoft.com/office/drawing/2014/main" id="{126FE2BE-5859-5EF0-2427-77D9D729843B}"/>
+              </a:ext>
+            </a:extLst>
+          </p:cNvPr>
+          <p:cNvSpPr>
+            <a:spLocks noGrp="1" noRot="1" noChangeAspect="1"/>
+          </p:cNvSpPr>
+          <p:nvPr>
+            <p:ph type="sldImg"/>
+          </p:nvPr>
+        </p:nvSpPr>
+        <p:spPr/>
+      </p:sp>
+      <p:sp>
+        <p:nvSpPr>
+          <p:cNvPr id="3" name="Notes Placeholder 2">
+            <a:extLst>
+              <a:ext uri="{FF2B5EF4-FFF2-40B4-BE49-F238E27FC236}">
+                <a16:creationId xmlns:a16="http://schemas.microsoft.com/office/drawing/2014/main" id="{6D9A9F40-FA08-A606-7D64-CFF5A547A43E}"/>
+              </a:ext>
+            </a:extLst>
+          </p:cNvPr>
+          <p:cNvSpPr>
+            <a:spLocks noGrp="1"/>
+          </p:cNvSpPr>
+          <p:nvPr>
+            <p:ph type="body" idx="1"/>
+          </p:nvPr>
+        </p:nvSpPr>
+        <p:spPr/>
+        <p:txBody>
+          <a:bodyPr/>
+          <a:lstStyle/>
+          <a:p>
+            <a:endParaRPr lang="en-PH" dirty="0"/>
+          </a:p>
+        </p:txBody>
+      </p:sp>
+      <p:sp>
+        <p:nvSpPr>
+          <p:cNvPr id="4" name="Slide Number Placeholder 3">
+            <a:extLst>
+              <a:ext uri="{FF2B5EF4-FFF2-40B4-BE49-F238E27FC236}">
+                <a16:creationId xmlns:a16="http://schemas.microsoft.com/office/drawing/2014/main" id="{C20A865A-67F0-AC98-7397-87D73ECB291D}"/>
+              </a:ext>
+            </a:extLst>
+          </p:cNvPr>
+          <p:cNvSpPr>
+            <a:spLocks noGrp="1"/>
+          </p:cNvSpPr>
+          <p:nvPr>
+            <p:ph type="sldNum" sz="quarter" idx="5"/>
+          </p:nvPr>
+        </p:nvSpPr>
+        <p:spPr/>
+        <p:txBody>
+          <a:bodyPr/>
+          <a:lstStyle/>
+          <a:p>
+            <a:fld id="{FE90CCE9-4AAE-4E1F-85AD-521A406D6524}" type="slidenum">
+              <a:rPr lang="en-PH" smtClean="0"/>
+              <a:t>10</a:t>
+            </a:fld>
+            <a:endParaRPr lang="en-PH"/>
+          </a:p>
+        </p:txBody>
+      </p:sp>
+    </p:spTree>
+    <p:extLst>
+      <p:ext uri="{BB962C8B-B14F-4D97-AF65-F5344CB8AC3E}">
+        <p14:creationId xmlns:p14="http://schemas.microsoft.com/office/powerpoint/2010/main" val="1662592848"/>
+      </p:ext>
+    </p:extLst>
+  </p:cSld>
+  <p:clrMapOvr>
+    <a:masterClrMapping/>
+  </p:clrMapOvr>
+</p:notes>
+</file>
+
+<file path=ppt/notesSlides/notesSlide11.xml><?xml version="1.0" encoding="utf-8"?>
+<p:notes xmlns:a="http://schemas.openxmlformats.org/drawingml/2006/main" xmlns:r="http://schemas.openxmlformats.org/officeDocument/2006/relationships" xmlns:p="http://schemas.openxmlformats.org/presentationml/2006/main">
+  <p:cSld>
+    <p:spTree>
+      <p:nvGrpSpPr>
+        <p:cNvPr id="1" name="">
+          <a:extLst>
+            <a:ext uri="{FF2B5EF4-FFF2-40B4-BE49-F238E27FC236}">
               <a16:creationId xmlns:a16="http://schemas.microsoft.com/office/drawing/2014/main" id="{BAC7A464-397F-E370-047C-39F7FD406D4D}"/>
             </a:ext>
           </a:extLst>
@@ -657,7 +766,7 @@
           <a:p>
             <a:fld id="{FE90CCE9-4AAE-4E1F-85AD-521A406D6524}" type="slidenum">
               <a:rPr lang="en-PH" smtClean="0"/>
-              <a:t>10</a:t>
+              <a:t>11</a:t>
             </a:fld>
             <a:endParaRPr lang="en-PH"/>
           </a:p>
@@ -676,7 +785,7 @@
 </p:notes>
 </file>
 
-<file path=ppt/notesSlides/notesSlide11.xml><?xml version="1.0" encoding="utf-8"?>
+<file path=ppt/notesSlides/notesSlide12.xml><?xml version="1.0" encoding="utf-8"?>
 <p:notes xmlns:a="http://schemas.openxmlformats.org/drawingml/2006/main" xmlns:r="http://schemas.openxmlformats.org/officeDocument/2006/relationships" xmlns:p="http://schemas.openxmlformats.org/presentationml/2006/main">
   <p:cSld>
     <p:spTree>
@@ -765,7 +874,7 @@
           <a:p>
             <a:fld id="{FE90CCE9-4AAE-4E1F-85AD-521A406D6524}" type="slidenum">
               <a:rPr lang="en-PH" smtClean="0"/>
-              <a:t>11</a:t>
+              <a:t>12</a:t>
             </a:fld>
             <a:endParaRPr lang="en-PH"/>
           </a:p>
@@ -784,7 +893,7 @@
 </p:notes>
 </file>
 
-<file path=ppt/notesSlides/notesSlide12.xml><?xml version="1.0" encoding="utf-8"?>
+<file path=ppt/notesSlides/notesSlide13.xml><?xml version="1.0" encoding="utf-8"?>
 <p:notes xmlns:a="http://schemas.openxmlformats.org/drawingml/2006/main" xmlns:r="http://schemas.openxmlformats.org/officeDocument/2006/relationships" xmlns:p="http://schemas.openxmlformats.org/presentationml/2006/main">
   <p:cSld>
     <p:spTree>
@@ -873,7 +982,7 @@
           <a:p>
             <a:fld id="{FE90CCE9-4AAE-4E1F-85AD-521A406D6524}" type="slidenum">
               <a:rPr lang="en-PH" smtClean="0"/>
-              <a:t>12</a:t>
+              <a:t>13</a:t>
             </a:fld>
             <a:endParaRPr lang="en-PH"/>
           </a:p>
@@ -5162,6 +5271,1196 @@
         <p:cNvPr id="1" name="">
           <a:extLst>
             <a:ext uri="{FF2B5EF4-FFF2-40B4-BE49-F238E27FC236}">
+              <a16:creationId xmlns:a16="http://schemas.microsoft.com/office/drawing/2014/main" id="{3F4E965A-316A-F73F-4F25-10F61355C12E}"/>
+            </a:ext>
+          </a:extLst>
+        </p:cNvPr>
+        <p:cNvGrpSpPr/>
+        <p:nvPr/>
+      </p:nvGrpSpPr>
+      <p:grpSpPr>
+        <a:xfrm>
+          <a:off x="0" y="0"/>
+          <a:ext cx="0" cy="0"/>
+          <a:chOff x="0" y="0"/>
+          <a:chExt cx="0" cy="0"/>
+        </a:xfrm>
+      </p:grpSpPr>
+      <p:sp>
+        <p:nvSpPr>
+          <p:cNvPr id="6" name="Title 1">
+            <a:extLst>
+              <a:ext uri="{FF2B5EF4-FFF2-40B4-BE49-F238E27FC236}">
+                <a16:creationId xmlns:a16="http://schemas.microsoft.com/office/drawing/2014/main" id="{A8BF5468-494E-6FCF-435E-D4F698217436}"/>
+              </a:ext>
+            </a:extLst>
+          </p:cNvPr>
+          <p:cNvSpPr>
+            <a:spLocks noGrp="1"/>
+          </p:cNvSpPr>
+          <p:nvPr>
+            <p:ph type="ctrTitle"/>
+          </p:nvPr>
+        </p:nvSpPr>
+        <p:spPr>
+          <a:xfrm>
+            <a:off x="1524000" y="497150"/>
+            <a:ext cx="9144000" cy="718459"/>
+          </a:xfrm>
+        </p:spPr>
+        <p:txBody>
+          <a:bodyPr>
+            <a:normAutofit fontScale="90000"/>
+          </a:bodyPr>
+          <a:lstStyle/>
+          <a:p>
+            <a:r>
+              <a:rPr lang="en-US" b="1" dirty="0">
+                <a:solidFill>
+                  <a:srgbClr val="00B050"/>
+                </a:solidFill>
+              </a:rPr>
+              <a:t>Recursion Example: Factorial	</a:t>
+            </a:r>
+            <a:endParaRPr lang="en-PH" dirty="0">
+              <a:solidFill>
+                <a:srgbClr val="00B050"/>
+              </a:solidFill>
+            </a:endParaRPr>
+          </a:p>
+        </p:txBody>
+      </p:sp>
+      <mc:AlternateContent xmlns:mc="http://schemas.openxmlformats.org/markup-compatibility/2006">
+        <mc:Choice xmlns:a14="http://schemas.microsoft.com/office/drawing/2010/main" Requires="a14">
+          <p:sp>
+            <p:nvSpPr>
+              <p:cNvPr id="10" name="TextBox 9">
+                <a:extLst>
+                  <a:ext uri="{FF2B5EF4-FFF2-40B4-BE49-F238E27FC236}">
+                    <a16:creationId xmlns:a16="http://schemas.microsoft.com/office/drawing/2014/main" id="{A55951BD-6A9C-0FC5-AF09-774611951C46}"/>
+                  </a:ext>
+                </a:extLst>
+              </p:cNvPr>
+              <p:cNvSpPr txBox="1"/>
+              <p:nvPr/>
+            </p:nvSpPr>
+            <p:spPr>
+              <a:xfrm>
+                <a:off x="2743200" y="5009631"/>
+                <a:ext cx="6705600" cy="861774"/>
+              </a:xfrm>
+              <a:prstGeom prst="rect">
+                <a:avLst/>
+              </a:prstGeom>
+              <a:noFill/>
+            </p:spPr>
+            <p:txBody>
+              <a:bodyPr wrap="square">
+                <a:spAutoFit/>
+              </a:bodyPr>
+              <a:lstStyle/>
+              <a:p>
+                <a:pPr algn="ctr"/>
+                <a14:m>
+                  <m:oMathPara xmlns:m="http://schemas.openxmlformats.org/officeDocument/2006/math">
+                    <m:oMathParaPr>
+                      <m:jc m:val="centerGroup"/>
+                    </m:oMathParaPr>
+                    <m:oMath xmlns:m="http://schemas.openxmlformats.org/officeDocument/2006/math">
+                      <m:r>
+                        <a:rPr lang="en-PH" sz="5000" b="1" i="1" dirty="0" smtClean="0">
+                          <a:solidFill>
+                            <a:schemeClr val="bg1"/>
+                          </a:solidFill>
+                          <a:latin typeface="Cambria Math" panose="02040503050406030204" pitchFamily="18" charset="0"/>
+                        </a:rPr>
+                        <m:t>𝟓</m:t>
+                      </m:r>
+                      <m:r>
+                        <a:rPr lang="en-PH" sz="5000" b="1" i="1" dirty="0" smtClean="0">
+                          <a:solidFill>
+                            <a:schemeClr val="bg1"/>
+                          </a:solidFill>
+                          <a:latin typeface="Cambria Math" panose="02040503050406030204" pitchFamily="18" charset="0"/>
+                        </a:rPr>
+                        <m:t>!=</m:t>
+                      </m:r>
+                      <m:r>
+                        <a:rPr lang="en-PH" sz="5000" b="1" i="1" dirty="0" smtClean="0">
+                          <a:solidFill>
+                            <a:schemeClr val="bg1"/>
+                          </a:solidFill>
+                          <a:latin typeface="Cambria Math" panose="02040503050406030204" pitchFamily="18" charset="0"/>
+                        </a:rPr>
+                        <m:t>𝟓</m:t>
+                      </m:r>
+                      <m:r>
+                        <a:rPr lang="en-PH" sz="5000" b="1" i="1" dirty="0" smtClean="0">
+                          <a:solidFill>
+                            <a:schemeClr val="bg1"/>
+                          </a:solidFill>
+                          <a:latin typeface="Cambria Math" panose="02040503050406030204" pitchFamily="18" charset="0"/>
+                        </a:rPr>
+                        <m:t> ×</m:t>
+                      </m:r>
+                      <m:r>
+                        <a:rPr lang="en-PH" sz="5000" b="1" i="1" dirty="0" smtClean="0">
+                          <a:solidFill>
+                            <a:schemeClr val="bg1"/>
+                          </a:solidFill>
+                          <a:latin typeface="Cambria Math" panose="02040503050406030204" pitchFamily="18" charset="0"/>
+                          <a:ea typeface="Cambria Math" panose="02040503050406030204" pitchFamily="18" charset="0"/>
+                        </a:rPr>
+                        <m:t>𝟒</m:t>
+                      </m:r>
+                      <m:r>
+                        <a:rPr lang="en-PH" sz="5000" b="1" i="1" dirty="0" smtClean="0">
+                          <a:solidFill>
+                            <a:schemeClr val="bg1"/>
+                          </a:solidFill>
+                          <a:latin typeface="Cambria Math" panose="02040503050406030204" pitchFamily="18" charset="0"/>
+                          <a:ea typeface="Cambria Math" panose="02040503050406030204" pitchFamily="18" charset="0"/>
+                        </a:rPr>
+                        <m:t>×</m:t>
+                      </m:r>
+                      <m:r>
+                        <a:rPr lang="en-PH" sz="5000" b="1" i="1" dirty="0" smtClean="0">
+                          <a:solidFill>
+                            <a:schemeClr val="bg1"/>
+                          </a:solidFill>
+                          <a:latin typeface="Cambria Math" panose="02040503050406030204" pitchFamily="18" charset="0"/>
+                          <a:ea typeface="Cambria Math" panose="02040503050406030204" pitchFamily="18" charset="0"/>
+                        </a:rPr>
+                        <m:t>𝟑</m:t>
+                      </m:r>
+                      <m:r>
+                        <a:rPr lang="en-PH" sz="5000" b="1" i="1" dirty="0">
+                          <a:solidFill>
+                            <a:schemeClr val="bg1"/>
+                          </a:solidFill>
+                          <a:latin typeface="Cambria Math" panose="02040503050406030204" pitchFamily="18" charset="0"/>
+                          <a:ea typeface="Cambria Math" panose="02040503050406030204" pitchFamily="18" charset="0"/>
+                        </a:rPr>
+                        <m:t>×</m:t>
+                      </m:r>
+                      <m:r>
+                        <a:rPr lang="en-PH" sz="5000" b="1" i="1" dirty="0" smtClean="0">
+                          <a:solidFill>
+                            <a:schemeClr val="bg1"/>
+                          </a:solidFill>
+                          <a:latin typeface="Cambria Math" panose="02040503050406030204" pitchFamily="18" charset="0"/>
+                          <a:ea typeface="Cambria Math" panose="02040503050406030204" pitchFamily="18" charset="0"/>
+                        </a:rPr>
+                        <m:t>𝟐</m:t>
+                      </m:r>
+                      <m:r>
+                        <a:rPr lang="en-PH" sz="5000" b="1" i="1" dirty="0">
+                          <a:solidFill>
+                            <a:schemeClr val="bg1"/>
+                          </a:solidFill>
+                          <a:latin typeface="Cambria Math" panose="02040503050406030204" pitchFamily="18" charset="0"/>
+                          <a:ea typeface="Cambria Math" panose="02040503050406030204" pitchFamily="18" charset="0"/>
+                        </a:rPr>
+                        <m:t>×</m:t>
+                      </m:r>
+                      <m:r>
+                        <a:rPr lang="en-PH" sz="5000" b="1" i="1" dirty="0" smtClean="0">
+                          <a:solidFill>
+                            <a:schemeClr val="bg1"/>
+                          </a:solidFill>
+                          <a:latin typeface="Cambria Math" panose="02040503050406030204" pitchFamily="18" charset="0"/>
+                          <a:ea typeface="Cambria Math" panose="02040503050406030204" pitchFamily="18" charset="0"/>
+                        </a:rPr>
+                        <m:t>𝟏</m:t>
+                      </m:r>
+                    </m:oMath>
+                  </m:oMathPara>
+                </a14:m>
+                <a:endParaRPr/>
+              </a:p>
+            </p:txBody>
+          </p:sp>
+        </mc:Choice>
+        <mc:Fallback>
+          <p:sp>
+            <p:nvSpPr>
+              <p:cNvPr id="10" name="TextBox 9">
+                <a:extLst>
+                  <a:ext uri="{FF2B5EF4-FFF2-40B4-BE49-F238E27FC236}">
+                    <a16:creationId xmlns:a16="http://schemas.microsoft.com/office/drawing/2014/main" id="{A55951BD-6A9C-0FC5-AF09-774611951C46}"/>
+                  </a:ext>
+                </a:extLst>
+              </p:cNvPr>
+              <p:cNvSpPr txBox="1">
+                <a:spLocks noRot="1" noChangeAspect="1" noMove="1" noResize="1" noEditPoints="1" noAdjustHandles="1" noChangeArrowheads="1" noChangeShapeType="1" noTextEdit="1"/>
+              </p:cNvSpPr>
+              <p:nvPr/>
+            </p:nvSpPr>
+            <p:spPr>
+              <a:xfrm>
+                <a:off x="2743200" y="5009631"/>
+                <a:ext cx="6705600" cy="861774"/>
+              </a:xfrm>
+              <a:prstGeom prst="rect">
+                <a:avLst/>
+              </a:prstGeom>
+              <a:blipFill>
+                <a:blip r:embed="rId3"/>
+                <a:stretch>
+                  <a:fillRect/>
+                </a:stretch>
+              </a:blipFill>
+            </p:spPr>
+            <p:txBody>
+              <a:bodyPr/>
+              <a:lstStyle/>
+              <a:p>
+                <a:r>
+                  <a:rPr lang="en-PH">
+                    <a:noFill/>
+                  </a:rPr>
+                  <a:t> </a:t>
+                </a:r>
+              </a:p>
+            </p:txBody>
+          </p:sp>
+        </mc:Fallback>
+      </mc:AlternateContent>
+      <mc:AlternateContent xmlns:mc="http://schemas.openxmlformats.org/markup-compatibility/2006">
+        <mc:Choice xmlns:a14="http://schemas.microsoft.com/office/drawing/2010/main" Requires="a14">
+          <p:sp>
+            <p:nvSpPr>
+              <p:cNvPr id="11" name="TextBox 10">
+                <a:extLst>
+                  <a:ext uri="{FF2B5EF4-FFF2-40B4-BE49-F238E27FC236}">
+                    <a16:creationId xmlns:a16="http://schemas.microsoft.com/office/drawing/2014/main" id="{3BF0FF1D-971F-52E4-FD9D-820969513F2B}"/>
+                  </a:ext>
+                </a:extLst>
+              </p:cNvPr>
+              <p:cNvSpPr txBox="1"/>
+              <p:nvPr/>
+            </p:nvSpPr>
+            <p:spPr>
+              <a:xfrm>
+                <a:off x="2743200" y="3215527"/>
+                <a:ext cx="6705600" cy="861774"/>
+              </a:xfrm>
+              <a:prstGeom prst="rect">
+                <a:avLst/>
+              </a:prstGeom>
+              <a:noFill/>
+            </p:spPr>
+            <p:txBody>
+              <a:bodyPr wrap="square">
+                <a:spAutoFit/>
+              </a:bodyPr>
+              <a:lstStyle/>
+              <a:p>
+                <a:pPr algn="ctr"/>
+                <a14:m>
+                  <m:oMathPara xmlns:m="http://schemas.openxmlformats.org/officeDocument/2006/math">
+                    <m:oMathParaPr>
+                      <m:jc m:val="centerGroup"/>
+                    </m:oMathParaPr>
+                    <m:oMath xmlns:m="http://schemas.openxmlformats.org/officeDocument/2006/math">
+                      <m:r>
+                        <a:rPr lang="en-PH" sz="5000" b="1" i="0" dirty="0" smtClean="0">
+                          <a:solidFill>
+                            <a:schemeClr val="bg1"/>
+                          </a:solidFill>
+                          <a:latin typeface="Cambria Math" panose="02040503050406030204" pitchFamily="18" charset="0"/>
+                        </a:rPr>
+                        <m:t>𝟑</m:t>
+                      </m:r>
+                      <m:r>
+                        <a:rPr lang="en-PH" sz="5000" b="1" i="1" dirty="0" smtClean="0">
+                          <a:solidFill>
+                            <a:schemeClr val="bg1"/>
+                          </a:solidFill>
+                          <a:latin typeface="Cambria Math" panose="02040503050406030204" pitchFamily="18" charset="0"/>
+                        </a:rPr>
+                        <m:t>!=</m:t>
+                      </m:r>
+                      <m:r>
+                        <a:rPr lang="en-PH" sz="5000" b="1" i="1" dirty="0" smtClean="0">
+                          <a:solidFill>
+                            <a:schemeClr val="bg1"/>
+                          </a:solidFill>
+                          <a:latin typeface="Cambria Math" panose="02040503050406030204" pitchFamily="18" charset="0"/>
+                          <a:ea typeface="Cambria Math" panose="02040503050406030204" pitchFamily="18" charset="0"/>
+                        </a:rPr>
+                        <m:t>𝟑</m:t>
+                      </m:r>
+                      <m:r>
+                        <a:rPr lang="en-PH" sz="5000" b="1" i="1" dirty="0">
+                          <a:solidFill>
+                            <a:schemeClr val="bg1"/>
+                          </a:solidFill>
+                          <a:latin typeface="Cambria Math" panose="02040503050406030204" pitchFamily="18" charset="0"/>
+                          <a:ea typeface="Cambria Math" panose="02040503050406030204" pitchFamily="18" charset="0"/>
+                        </a:rPr>
+                        <m:t>×</m:t>
+                      </m:r>
+                      <m:r>
+                        <a:rPr lang="en-PH" sz="5000" b="1" i="1" dirty="0" smtClean="0">
+                          <a:solidFill>
+                            <a:schemeClr val="bg1"/>
+                          </a:solidFill>
+                          <a:latin typeface="Cambria Math" panose="02040503050406030204" pitchFamily="18" charset="0"/>
+                          <a:ea typeface="Cambria Math" panose="02040503050406030204" pitchFamily="18" charset="0"/>
+                        </a:rPr>
+                        <m:t>𝟐</m:t>
+                      </m:r>
+                      <m:r>
+                        <a:rPr lang="en-PH" sz="5000" b="1" i="1" dirty="0">
+                          <a:solidFill>
+                            <a:schemeClr val="bg1"/>
+                          </a:solidFill>
+                          <a:latin typeface="Cambria Math" panose="02040503050406030204" pitchFamily="18" charset="0"/>
+                          <a:ea typeface="Cambria Math" panose="02040503050406030204" pitchFamily="18" charset="0"/>
+                        </a:rPr>
+                        <m:t>×</m:t>
+                      </m:r>
+                      <m:r>
+                        <a:rPr lang="en-PH" sz="5000" b="1" i="1" dirty="0" smtClean="0">
+                          <a:solidFill>
+                            <a:schemeClr val="bg1"/>
+                          </a:solidFill>
+                          <a:latin typeface="Cambria Math" panose="02040503050406030204" pitchFamily="18" charset="0"/>
+                          <a:ea typeface="Cambria Math" panose="02040503050406030204" pitchFamily="18" charset="0"/>
+                        </a:rPr>
+                        <m:t>𝟏</m:t>
+                      </m:r>
+                    </m:oMath>
+                  </m:oMathPara>
+                </a14:m>
+                <a:endParaRPr/>
+              </a:p>
+            </p:txBody>
+          </p:sp>
+        </mc:Choice>
+        <mc:Fallback>
+          <p:sp>
+            <p:nvSpPr>
+              <p:cNvPr id="11" name="TextBox 10">
+                <a:extLst>
+                  <a:ext uri="{FF2B5EF4-FFF2-40B4-BE49-F238E27FC236}">
+                    <a16:creationId xmlns:a16="http://schemas.microsoft.com/office/drawing/2014/main" id="{3BF0FF1D-971F-52E4-FD9D-820969513F2B}"/>
+                  </a:ext>
+                </a:extLst>
+              </p:cNvPr>
+              <p:cNvSpPr txBox="1">
+                <a:spLocks noRot="1" noChangeAspect="1" noMove="1" noResize="1" noEditPoints="1" noAdjustHandles="1" noChangeArrowheads="1" noChangeShapeType="1" noTextEdit="1"/>
+              </p:cNvSpPr>
+              <p:nvPr/>
+            </p:nvSpPr>
+            <p:spPr>
+              <a:xfrm>
+                <a:off x="2743200" y="3215527"/>
+                <a:ext cx="6705600" cy="861774"/>
+              </a:xfrm>
+              <a:prstGeom prst="rect">
+                <a:avLst/>
+              </a:prstGeom>
+              <a:blipFill>
+                <a:blip r:embed="rId4"/>
+                <a:stretch>
+                  <a:fillRect/>
+                </a:stretch>
+              </a:blipFill>
+            </p:spPr>
+            <p:txBody>
+              <a:bodyPr/>
+              <a:lstStyle/>
+              <a:p>
+                <a:r>
+                  <a:rPr lang="en-PH">
+                    <a:noFill/>
+                  </a:rPr>
+                  <a:t> </a:t>
+                </a:r>
+              </a:p>
+            </p:txBody>
+          </p:sp>
+        </mc:Fallback>
+      </mc:AlternateContent>
+      <mc:AlternateContent xmlns:mc="http://schemas.openxmlformats.org/markup-compatibility/2006">
+        <mc:Choice xmlns:a14="http://schemas.microsoft.com/office/drawing/2010/main" Requires="a14">
+          <p:sp>
+            <p:nvSpPr>
+              <p:cNvPr id="12" name="TextBox 11">
+                <a:extLst>
+                  <a:ext uri="{FF2B5EF4-FFF2-40B4-BE49-F238E27FC236}">
+                    <a16:creationId xmlns:a16="http://schemas.microsoft.com/office/drawing/2014/main" id="{B937FED6-9CC3-E2DB-E667-87D64386B2FF}"/>
+                  </a:ext>
+                </a:extLst>
+              </p:cNvPr>
+              <p:cNvSpPr txBox="1"/>
+              <p:nvPr/>
+            </p:nvSpPr>
+            <p:spPr>
+              <a:xfrm>
+                <a:off x="2743200" y="2353753"/>
+                <a:ext cx="6705600" cy="861774"/>
+              </a:xfrm>
+              <a:prstGeom prst="rect">
+                <a:avLst/>
+              </a:prstGeom>
+              <a:noFill/>
+            </p:spPr>
+            <p:txBody>
+              <a:bodyPr wrap="square">
+                <a:spAutoFit/>
+              </a:bodyPr>
+              <a:lstStyle/>
+              <a:p>
+                <a:pPr algn="ctr"/>
+                <a14:m>
+                  <m:oMathPara xmlns:m="http://schemas.openxmlformats.org/officeDocument/2006/math">
+                    <m:oMathParaPr>
+                      <m:jc m:val="centerGroup"/>
+                    </m:oMathParaPr>
+                    <m:oMath xmlns:m="http://schemas.openxmlformats.org/officeDocument/2006/math">
+                      <m:r>
+                        <a:rPr lang="en-PH" sz="5000" b="1" i="0" dirty="0" smtClean="0">
+                          <a:solidFill>
+                            <a:schemeClr val="bg1"/>
+                          </a:solidFill>
+                          <a:latin typeface="Cambria Math" panose="02040503050406030204" pitchFamily="18" charset="0"/>
+                        </a:rPr>
+                        <m:t>𝟐</m:t>
+                      </m:r>
+                      <m:r>
+                        <a:rPr lang="en-PH" sz="5000" b="1" i="1" dirty="0" smtClean="0">
+                          <a:solidFill>
+                            <a:schemeClr val="bg1"/>
+                          </a:solidFill>
+                          <a:latin typeface="Cambria Math" panose="02040503050406030204" pitchFamily="18" charset="0"/>
+                        </a:rPr>
+                        <m:t>!=</m:t>
+                      </m:r>
+                      <m:r>
+                        <a:rPr lang="en-PH" sz="5000" b="1" i="1" dirty="0" smtClean="0">
+                          <a:solidFill>
+                            <a:schemeClr val="bg1"/>
+                          </a:solidFill>
+                          <a:latin typeface="Cambria Math" panose="02040503050406030204" pitchFamily="18" charset="0"/>
+                          <a:ea typeface="Cambria Math" panose="02040503050406030204" pitchFamily="18" charset="0"/>
+                        </a:rPr>
+                        <m:t>𝟐</m:t>
+                      </m:r>
+                      <m:r>
+                        <a:rPr lang="en-PH" sz="5000" b="1" i="1" dirty="0">
+                          <a:solidFill>
+                            <a:schemeClr val="bg1"/>
+                          </a:solidFill>
+                          <a:latin typeface="Cambria Math" panose="02040503050406030204" pitchFamily="18" charset="0"/>
+                          <a:ea typeface="Cambria Math" panose="02040503050406030204" pitchFamily="18" charset="0"/>
+                        </a:rPr>
+                        <m:t>×</m:t>
+                      </m:r>
+                      <m:r>
+                        <a:rPr lang="en-PH" sz="5000" b="1" i="1" dirty="0" smtClean="0">
+                          <a:solidFill>
+                            <a:schemeClr val="bg1"/>
+                          </a:solidFill>
+                          <a:latin typeface="Cambria Math" panose="02040503050406030204" pitchFamily="18" charset="0"/>
+                          <a:ea typeface="Cambria Math" panose="02040503050406030204" pitchFamily="18" charset="0"/>
+                        </a:rPr>
+                        <m:t>𝟏</m:t>
+                      </m:r>
+                    </m:oMath>
+                  </m:oMathPara>
+                </a14:m>
+                <a:endParaRPr/>
+              </a:p>
+            </p:txBody>
+          </p:sp>
+        </mc:Choice>
+        <mc:Fallback>
+          <p:sp>
+            <p:nvSpPr>
+              <p:cNvPr id="12" name="TextBox 11">
+                <a:extLst>
+                  <a:ext uri="{FF2B5EF4-FFF2-40B4-BE49-F238E27FC236}">
+                    <a16:creationId xmlns:a16="http://schemas.microsoft.com/office/drawing/2014/main" id="{B937FED6-9CC3-E2DB-E667-87D64386B2FF}"/>
+                  </a:ext>
+                </a:extLst>
+              </p:cNvPr>
+              <p:cNvSpPr txBox="1">
+                <a:spLocks noRot="1" noChangeAspect="1" noMove="1" noResize="1" noEditPoints="1" noAdjustHandles="1" noChangeArrowheads="1" noChangeShapeType="1" noTextEdit="1"/>
+              </p:cNvSpPr>
+              <p:nvPr/>
+            </p:nvSpPr>
+            <p:spPr>
+              <a:xfrm>
+                <a:off x="2743200" y="2353753"/>
+                <a:ext cx="6705600" cy="861774"/>
+              </a:xfrm>
+              <a:prstGeom prst="rect">
+                <a:avLst/>
+              </a:prstGeom>
+              <a:blipFill>
+                <a:blip r:embed="rId5"/>
+                <a:stretch>
+                  <a:fillRect/>
+                </a:stretch>
+              </a:blipFill>
+            </p:spPr>
+            <p:txBody>
+              <a:bodyPr/>
+              <a:lstStyle/>
+              <a:p>
+                <a:r>
+                  <a:rPr lang="en-PH">
+                    <a:noFill/>
+                  </a:rPr>
+                  <a:t> </a:t>
+                </a:r>
+              </a:p>
+            </p:txBody>
+          </p:sp>
+        </mc:Fallback>
+      </mc:AlternateContent>
+      <mc:AlternateContent xmlns:mc="http://schemas.openxmlformats.org/markup-compatibility/2006">
+        <mc:Choice xmlns:a14="http://schemas.microsoft.com/office/drawing/2010/main" Requires="a14">
+          <p:sp>
+            <p:nvSpPr>
+              <p:cNvPr id="13" name="TextBox 12">
+                <a:extLst>
+                  <a:ext uri="{FF2B5EF4-FFF2-40B4-BE49-F238E27FC236}">
+                    <a16:creationId xmlns:a16="http://schemas.microsoft.com/office/drawing/2014/main" id="{4454CDC5-A8A0-3B14-CC64-6BD5E98D253F}"/>
+                  </a:ext>
+                </a:extLst>
+              </p:cNvPr>
+              <p:cNvSpPr txBox="1"/>
+              <p:nvPr/>
+            </p:nvSpPr>
+            <p:spPr>
+              <a:xfrm>
+                <a:off x="2743200" y="1491979"/>
+                <a:ext cx="6705600" cy="861774"/>
+              </a:xfrm>
+              <a:prstGeom prst="rect">
+                <a:avLst/>
+              </a:prstGeom>
+              <a:noFill/>
+            </p:spPr>
+            <p:txBody>
+              <a:bodyPr wrap="square">
+                <a:spAutoFit/>
+              </a:bodyPr>
+              <a:lstStyle/>
+              <a:p>
+                <a:pPr algn="ctr"/>
+                <a14:m>
+                  <m:oMathPara xmlns:m="http://schemas.openxmlformats.org/officeDocument/2006/math">
+                    <m:oMathParaPr>
+                      <m:jc m:val="centerGroup"/>
+                    </m:oMathParaPr>
+                    <m:oMath xmlns:m="http://schemas.openxmlformats.org/officeDocument/2006/math">
+                      <m:r>
+                        <a:rPr lang="en-PH" sz="5000" b="1" i="0" dirty="0" smtClean="0">
+                          <a:solidFill>
+                            <a:schemeClr val="bg1"/>
+                          </a:solidFill>
+                          <a:latin typeface="Cambria Math" panose="02040503050406030204" pitchFamily="18" charset="0"/>
+                        </a:rPr>
+                        <m:t>𝟏</m:t>
+                      </m:r>
+                      <m:r>
+                        <a:rPr lang="en-PH" sz="5000" b="1" i="1" dirty="0" smtClean="0">
+                          <a:solidFill>
+                            <a:schemeClr val="bg1"/>
+                          </a:solidFill>
+                          <a:latin typeface="Cambria Math" panose="02040503050406030204" pitchFamily="18" charset="0"/>
+                        </a:rPr>
+                        <m:t>!=</m:t>
+                      </m:r>
+                      <m:r>
+                        <a:rPr lang="en-PH" sz="5000" b="1" i="1" dirty="0" smtClean="0">
+                          <a:solidFill>
+                            <a:schemeClr val="bg1"/>
+                          </a:solidFill>
+                          <a:latin typeface="Cambria Math" panose="02040503050406030204" pitchFamily="18" charset="0"/>
+                          <a:ea typeface="Cambria Math" panose="02040503050406030204" pitchFamily="18" charset="0"/>
+                        </a:rPr>
+                        <m:t>𝟏</m:t>
+                      </m:r>
+                    </m:oMath>
+                  </m:oMathPara>
+                </a14:m>
+                <a:endParaRPr/>
+              </a:p>
+            </p:txBody>
+          </p:sp>
+        </mc:Choice>
+        <mc:Fallback>
+          <p:sp>
+            <p:nvSpPr>
+              <p:cNvPr id="13" name="TextBox 12">
+                <a:extLst>
+                  <a:ext uri="{FF2B5EF4-FFF2-40B4-BE49-F238E27FC236}">
+                    <a16:creationId xmlns:a16="http://schemas.microsoft.com/office/drawing/2014/main" id="{4454CDC5-A8A0-3B14-CC64-6BD5E98D253F}"/>
+                  </a:ext>
+                </a:extLst>
+              </p:cNvPr>
+              <p:cNvSpPr txBox="1">
+                <a:spLocks noRot="1" noChangeAspect="1" noMove="1" noResize="1" noEditPoints="1" noAdjustHandles="1" noChangeArrowheads="1" noChangeShapeType="1" noTextEdit="1"/>
+              </p:cNvSpPr>
+              <p:nvPr/>
+            </p:nvSpPr>
+            <p:spPr>
+              <a:xfrm>
+                <a:off x="2743200" y="1491979"/>
+                <a:ext cx="6705600" cy="861774"/>
+              </a:xfrm>
+              <a:prstGeom prst="rect">
+                <a:avLst/>
+              </a:prstGeom>
+              <a:blipFill>
+                <a:blip r:embed="rId6"/>
+                <a:stretch>
+                  <a:fillRect/>
+                </a:stretch>
+              </a:blipFill>
+            </p:spPr>
+            <p:txBody>
+              <a:bodyPr/>
+              <a:lstStyle/>
+              <a:p>
+                <a:r>
+                  <a:rPr lang="en-PH">
+                    <a:noFill/>
+                  </a:rPr>
+                  <a:t> </a:t>
+                </a:r>
+              </a:p>
+            </p:txBody>
+          </p:sp>
+        </mc:Fallback>
+      </mc:AlternateContent>
+      <mc:AlternateContent xmlns:mc="http://schemas.openxmlformats.org/markup-compatibility/2006">
+        <mc:Choice xmlns:a14="http://schemas.microsoft.com/office/drawing/2010/main" Requires="a14">
+          <p:sp>
+            <p:nvSpPr>
+              <p:cNvPr id="14" name="TextBox 13">
+                <a:extLst>
+                  <a:ext uri="{FF2B5EF4-FFF2-40B4-BE49-F238E27FC236}">
+                    <a16:creationId xmlns:a16="http://schemas.microsoft.com/office/drawing/2014/main" id="{91D5C30B-D0E4-0AC9-ADE3-FE9A017806C9}"/>
+                  </a:ext>
+                </a:extLst>
+              </p:cNvPr>
+              <p:cNvSpPr txBox="1"/>
+              <p:nvPr/>
+            </p:nvSpPr>
+            <p:spPr>
+              <a:xfrm>
+                <a:off x="2743200" y="4112579"/>
+                <a:ext cx="6705600" cy="861774"/>
+              </a:xfrm>
+              <a:prstGeom prst="rect">
+                <a:avLst/>
+              </a:prstGeom>
+              <a:noFill/>
+            </p:spPr>
+            <p:txBody>
+              <a:bodyPr wrap="square">
+                <a:spAutoFit/>
+              </a:bodyPr>
+              <a:lstStyle/>
+              <a:p>
+                <a:pPr algn="ctr"/>
+                <a14:m>
+                  <m:oMathPara xmlns:m="http://schemas.openxmlformats.org/officeDocument/2006/math">
+                    <m:oMathParaPr>
+                      <m:jc m:val="centerGroup"/>
+                    </m:oMathParaPr>
+                    <m:oMath xmlns:m="http://schemas.openxmlformats.org/officeDocument/2006/math">
+                      <m:r>
+                        <a:rPr lang="en-PH" sz="5000" b="1" i="1" dirty="0" smtClean="0">
+                          <a:solidFill>
+                            <a:schemeClr val="bg1"/>
+                          </a:solidFill>
+                          <a:latin typeface="Cambria Math" panose="02040503050406030204" pitchFamily="18" charset="0"/>
+                        </a:rPr>
+                        <m:t>𝟒</m:t>
+                      </m:r>
+                      <m:r>
+                        <a:rPr lang="en-PH" sz="5000" b="1" i="1" dirty="0" smtClean="0">
+                          <a:solidFill>
+                            <a:schemeClr val="bg1"/>
+                          </a:solidFill>
+                          <a:latin typeface="Cambria Math" panose="02040503050406030204" pitchFamily="18" charset="0"/>
+                        </a:rPr>
+                        <m:t>!=</m:t>
+                      </m:r>
+                      <m:r>
+                        <a:rPr lang="en-PH" sz="5000" b="1" i="1" dirty="0" smtClean="0">
+                          <a:solidFill>
+                            <a:schemeClr val="bg1"/>
+                          </a:solidFill>
+                          <a:latin typeface="Cambria Math" panose="02040503050406030204" pitchFamily="18" charset="0"/>
+                          <a:ea typeface="Cambria Math" panose="02040503050406030204" pitchFamily="18" charset="0"/>
+                        </a:rPr>
+                        <m:t>𝟒</m:t>
+                      </m:r>
+                      <m:r>
+                        <a:rPr lang="en-PH" sz="5000" b="1" i="1" dirty="0" smtClean="0">
+                          <a:solidFill>
+                            <a:schemeClr val="bg1"/>
+                          </a:solidFill>
+                          <a:latin typeface="Cambria Math" panose="02040503050406030204" pitchFamily="18" charset="0"/>
+                          <a:ea typeface="Cambria Math" panose="02040503050406030204" pitchFamily="18" charset="0"/>
+                        </a:rPr>
+                        <m:t>×</m:t>
+                      </m:r>
+                      <m:r>
+                        <a:rPr lang="en-PH" sz="5000" b="1" i="1" dirty="0" smtClean="0">
+                          <a:solidFill>
+                            <a:schemeClr val="bg1"/>
+                          </a:solidFill>
+                          <a:latin typeface="Cambria Math" panose="02040503050406030204" pitchFamily="18" charset="0"/>
+                          <a:ea typeface="Cambria Math" panose="02040503050406030204" pitchFamily="18" charset="0"/>
+                        </a:rPr>
+                        <m:t>𝟑</m:t>
+                      </m:r>
+                      <m:r>
+                        <a:rPr lang="en-PH" sz="5000" b="1" i="1" dirty="0">
+                          <a:solidFill>
+                            <a:schemeClr val="bg1"/>
+                          </a:solidFill>
+                          <a:latin typeface="Cambria Math" panose="02040503050406030204" pitchFamily="18" charset="0"/>
+                          <a:ea typeface="Cambria Math" panose="02040503050406030204" pitchFamily="18" charset="0"/>
+                        </a:rPr>
+                        <m:t>×</m:t>
+                      </m:r>
+                      <m:r>
+                        <a:rPr lang="en-PH" sz="5000" b="1" i="1" dirty="0" smtClean="0">
+                          <a:solidFill>
+                            <a:schemeClr val="bg1"/>
+                          </a:solidFill>
+                          <a:latin typeface="Cambria Math" panose="02040503050406030204" pitchFamily="18" charset="0"/>
+                          <a:ea typeface="Cambria Math" panose="02040503050406030204" pitchFamily="18" charset="0"/>
+                        </a:rPr>
+                        <m:t>𝟐</m:t>
+                      </m:r>
+                      <m:r>
+                        <a:rPr lang="en-PH" sz="5000" b="1" i="1" dirty="0">
+                          <a:solidFill>
+                            <a:schemeClr val="bg1"/>
+                          </a:solidFill>
+                          <a:latin typeface="Cambria Math" panose="02040503050406030204" pitchFamily="18" charset="0"/>
+                          <a:ea typeface="Cambria Math" panose="02040503050406030204" pitchFamily="18" charset="0"/>
+                        </a:rPr>
+                        <m:t>×</m:t>
+                      </m:r>
+                      <m:r>
+                        <a:rPr lang="en-PH" sz="5000" b="1" i="1" dirty="0" smtClean="0">
+                          <a:solidFill>
+                            <a:schemeClr val="bg1"/>
+                          </a:solidFill>
+                          <a:latin typeface="Cambria Math" panose="02040503050406030204" pitchFamily="18" charset="0"/>
+                          <a:ea typeface="Cambria Math" panose="02040503050406030204" pitchFamily="18" charset="0"/>
+                        </a:rPr>
+                        <m:t>𝟏</m:t>
+                      </m:r>
+                    </m:oMath>
+                  </m:oMathPara>
+                </a14:m>
+                <a:endParaRPr/>
+              </a:p>
+            </p:txBody>
+          </p:sp>
+        </mc:Choice>
+        <mc:Fallback>
+          <p:sp>
+            <p:nvSpPr>
+              <p:cNvPr id="14" name="TextBox 13">
+                <a:extLst>
+                  <a:ext uri="{FF2B5EF4-FFF2-40B4-BE49-F238E27FC236}">
+                    <a16:creationId xmlns:a16="http://schemas.microsoft.com/office/drawing/2014/main" id="{91D5C30B-D0E4-0AC9-ADE3-FE9A017806C9}"/>
+                  </a:ext>
+                </a:extLst>
+              </p:cNvPr>
+              <p:cNvSpPr txBox="1">
+                <a:spLocks noRot="1" noChangeAspect="1" noMove="1" noResize="1" noEditPoints="1" noAdjustHandles="1" noChangeArrowheads="1" noChangeShapeType="1" noTextEdit="1"/>
+              </p:cNvSpPr>
+              <p:nvPr/>
+            </p:nvSpPr>
+            <p:spPr>
+              <a:xfrm>
+                <a:off x="2743200" y="4112579"/>
+                <a:ext cx="6705600" cy="861774"/>
+              </a:xfrm>
+              <a:prstGeom prst="rect">
+                <a:avLst/>
+              </a:prstGeom>
+              <a:blipFill>
+                <a:blip r:embed="rId7"/>
+                <a:stretch>
+                  <a:fillRect/>
+                </a:stretch>
+              </a:blipFill>
+            </p:spPr>
+            <p:txBody>
+              <a:bodyPr/>
+              <a:lstStyle/>
+              <a:p>
+                <a:r>
+                  <a:rPr lang="en-PH">
+                    <a:noFill/>
+                  </a:rPr>
+                  <a:t> </a:t>
+                </a:r>
+              </a:p>
+            </p:txBody>
+          </p:sp>
+        </mc:Fallback>
+      </mc:AlternateContent>
+    </p:spTree>
+    <p:extLst>
+      <p:ext uri="{BB962C8B-B14F-4D97-AF65-F5344CB8AC3E}">
+        <p14:creationId xmlns:p14="http://schemas.microsoft.com/office/powerpoint/2010/main" val="3126959784"/>
+      </p:ext>
+    </p:extLst>
+  </p:cSld>
+  <p:clrMapOvr>
+    <a:masterClrMapping/>
+  </p:clrMapOvr>
+  <mc:AlternateContent xmlns:mc="http://schemas.openxmlformats.org/markup-compatibility/2006">
+    <mc:Choice xmlns:p159="http://schemas.microsoft.com/office/powerpoint/2015/09/main" Requires="p159">
+      <p:transition xmlns:p14="http://schemas.microsoft.com/office/powerpoint/2010/main" spd="slow" p14:dur="2000">
+        <p159:morph option="byObject"/>
+      </p:transition>
+    </mc:Choice>
+    <mc:Fallback>
+      <p:transition spd="slow">
+        <p:fade/>
+      </p:transition>
+    </mc:Fallback>
+  </mc:AlternateContent>
+  <p:timing>
+    <p:tnLst>
+      <p:par>
+        <p:cTn id="1" dur="indefinite" restart="never" nodeType="tmRoot">
+          <p:childTnLst>
+            <p:seq concurrent="1" nextAc="seek">
+              <p:cTn id="2" dur="indefinite" nodeType="mainSeq">
+                <p:childTnLst>
+                  <p:par>
+                    <p:cTn id="3" fill="hold">
+                      <p:stCondLst>
+                        <p:cond delay="indefinite"/>
+                      </p:stCondLst>
+                      <p:childTnLst>
+                        <p:par>
+                          <p:cTn id="4" fill="hold">
+                            <p:stCondLst>
+                              <p:cond delay="0"/>
+                            </p:stCondLst>
+                            <p:childTnLst>
+                              <p:par>
+                                <p:cTn id="5" presetID="10" presetClass="entr" presetSubtype="0" fill="hold" grpId="0" nodeType="clickEffect">
+                                  <p:stCondLst>
+                                    <p:cond delay="0"/>
+                                  </p:stCondLst>
+                                  <p:childTnLst>
+                                    <p:set>
+                                      <p:cBhvr>
+                                        <p:cTn id="6" dur="1" fill="hold">
+                                          <p:stCondLst>
+                                            <p:cond delay="0"/>
+                                          </p:stCondLst>
+                                        </p:cTn>
+                                        <p:tgtEl>
+                                          <p:spTgt spid="13"/>
+                                        </p:tgtEl>
+                                        <p:attrNameLst>
+                                          <p:attrName>style.visibility</p:attrName>
+                                        </p:attrNameLst>
+                                      </p:cBhvr>
+                                      <p:to>
+                                        <p:strVal val="visible"/>
+                                      </p:to>
+                                    </p:set>
+                                    <p:animEffect transition="in" filter="fade">
+                                      <p:cBhvr>
+                                        <p:cTn id="7" dur="500"/>
+                                        <p:tgtEl>
+                                          <p:spTgt spid="13"/>
+                                        </p:tgtEl>
+                                      </p:cBhvr>
+                                    </p:animEffect>
+                                  </p:childTnLst>
+                                </p:cTn>
+                              </p:par>
+                            </p:childTnLst>
+                          </p:cTn>
+                        </p:par>
+                      </p:childTnLst>
+                    </p:cTn>
+                  </p:par>
+                  <p:par>
+                    <p:cTn id="8" fill="hold">
+                      <p:stCondLst>
+                        <p:cond delay="indefinite"/>
+                      </p:stCondLst>
+                      <p:childTnLst>
+                        <p:par>
+                          <p:cTn id="9" fill="hold">
+                            <p:stCondLst>
+                              <p:cond delay="0"/>
+                            </p:stCondLst>
+                            <p:childTnLst>
+                              <p:par>
+                                <p:cTn id="10" presetID="10" presetClass="entr" presetSubtype="0" fill="hold" grpId="0" nodeType="clickEffect">
+                                  <p:stCondLst>
+                                    <p:cond delay="0"/>
+                                  </p:stCondLst>
+                                  <p:childTnLst>
+                                    <p:set>
+                                      <p:cBhvr>
+                                        <p:cTn id="11" dur="1" fill="hold">
+                                          <p:stCondLst>
+                                            <p:cond delay="0"/>
+                                          </p:stCondLst>
+                                        </p:cTn>
+                                        <p:tgtEl>
+                                          <p:spTgt spid="12"/>
+                                        </p:tgtEl>
+                                        <p:attrNameLst>
+                                          <p:attrName>style.visibility</p:attrName>
+                                        </p:attrNameLst>
+                                      </p:cBhvr>
+                                      <p:to>
+                                        <p:strVal val="visible"/>
+                                      </p:to>
+                                    </p:set>
+                                    <p:animEffect transition="in" filter="fade">
+                                      <p:cBhvr>
+                                        <p:cTn id="12" dur="500"/>
+                                        <p:tgtEl>
+                                          <p:spTgt spid="12"/>
+                                        </p:tgtEl>
+                                      </p:cBhvr>
+                                    </p:animEffect>
+                                  </p:childTnLst>
+                                </p:cTn>
+                              </p:par>
+                            </p:childTnLst>
+                          </p:cTn>
+                        </p:par>
+                      </p:childTnLst>
+                    </p:cTn>
+                  </p:par>
+                  <p:par>
+                    <p:cTn id="13" fill="hold">
+                      <p:stCondLst>
+                        <p:cond delay="indefinite"/>
+                      </p:stCondLst>
+                      <p:childTnLst>
+                        <p:par>
+                          <p:cTn id="14" fill="hold">
+                            <p:stCondLst>
+                              <p:cond delay="0"/>
+                            </p:stCondLst>
+                            <p:childTnLst>
+                              <p:par>
+                                <p:cTn id="15" presetID="10" presetClass="entr" presetSubtype="0" fill="hold" grpId="0" nodeType="clickEffect">
+                                  <p:stCondLst>
+                                    <p:cond delay="0"/>
+                                  </p:stCondLst>
+                                  <p:childTnLst>
+                                    <p:set>
+                                      <p:cBhvr>
+                                        <p:cTn id="16" dur="1" fill="hold">
+                                          <p:stCondLst>
+                                            <p:cond delay="0"/>
+                                          </p:stCondLst>
+                                        </p:cTn>
+                                        <p:tgtEl>
+                                          <p:spTgt spid="11"/>
+                                        </p:tgtEl>
+                                        <p:attrNameLst>
+                                          <p:attrName>style.visibility</p:attrName>
+                                        </p:attrNameLst>
+                                      </p:cBhvr>
+                                      <p:to>
+                                        <p:strVal val="visible"/>
+                                      </p:to>
+                                    </p:set>
+                                    <p:animEffect transition="in" filter="fade">
+                                      <p:cBhvr>
+                                        <p:cTn id="17" dur="500"/>
+                                        <p:tgtEl>
+                                          <p:spTgt spid="11"/>
+                                        </p:tgtEl>
+                                      </p:cBhvr>
+                                    </p:animEffect>
+                                  </p:childTnLst>
+                                </p:cTn>
+                              </p:par>
+                            </p:childTnLst>
+                          </p:cTn>
+                        </p:par>
+                      </p:childTnLst>
+                    </p:cTn>
+                  </p:par>
+                  <p:par>
+                    <p:cTn id="18" fill="hold">
+                      <p:stCondLst>
+                        <p:cond delay="indefinite"/>
+                      </p:stCondLst>
+                      <p:childTnLst>
+                        <p:par>
+                          <p:cTn id="19" fill="hold">
+                            <p:stCondLst>
+                              <p:cond delay="0"/>
+                            </p:stCondLst>
+                            <p:childTnLst>
+                              <p:par>
+                                <p:cTn id="20" presetID="10" presetClass="entr" presetSubtype="0" fill="hold" grpId="0" nodeType="clickEffect">
+                                  <p:stCondLst>
+                                    <p:cond delay="0"/>
+                                  </p:stCondLst>
+                                  <p:childTnLst>
+                                    <p:set>
+                                      <p:cBhvr>
+                                        <p:cTn id="21" dur="1" fill="hold">
+                                          <p:stCondLst>
+                                            <p:cond delay="0"/>
+                                          </p:stCondLst>
+                                        </p:cTn>
+                                        <p:tgtEl>
+                                          <p:spTgt spid="14"/>
+                                        </p:tgtEl>
+                                        <p:attrNameLst>
+                                          <p:attrName>style.visibility</p:attrName>
+                                        </p:attrNameLst>
+                                      </p:cBhvr>
+                                      <p:to>
+                                        <p:strVal val="visible"/>
+                                      </p:to>
+                                    </p:set>
+                                    <p:animEffect transition="in" filter="fade">
+                                      <p:cBhvr>
+                                        <p:cTn id="22" dur="500"/>
+                                        <p:tgtEl>
+                                          <p:spTgt spid="14"/>
+                                        </p:tgtEl>
+                                      </p:cBhvr>
+                                    </p:animEffect>
+                                  </p:childTnLst>
+                                </p:cTn>
+                              </p:par>
+                            </p:childTnLst>
+                          </p:cTn>
+                        </p:par>
+                      </p:childTnLst>
+                    </p:cTn>
+                  </p:par>
+                  <p:par>
+                    <p:cTn id="23" fill="hold">
+                      <p:stCondLst>
+                        <p:cond delay="indefinite"/>
+                      </p:stCondLst>
+                      <p:childTnLst>
+                        <p:par>
+                          <p:cTn id="24" fill="hold">
+                            <p:stCondLst>
+                              <p:cond delay="0"/>
+                            </p:stCondLst>
+                            <p:childTnLst>
+                              <p:par>
+                                <p:cTn id="25" presetID="10" presetClass="entr" presetSubtype="0" fill="hold" grpId="0" nodeType="clickEffect">
+                                  <p:stCondLst>
+                                    <p:cond delay="0"/>
+                                  </p:stCondLst>
+                                  <p:childTnLst>
+                                    <p:set>
+                                      <p:cBhvr>
+                                        <p:cTn id="26" dur="1" fill="hold">
+                                          <p:stCondLst>
+                                            <p:cond delay="0"/>
+                                          </p:stCondLst>
+                                        </p:cTn>
+                                        <p:tgtEl>
+                                          <p:spTgt spid="10"/>
+                                        </p:tgtEl>
+                                        <p:attrNameLst>
+                                          <p:attrName>style.visibility</p:attrName>
+                                        </p:attrNameLst>
+                                      </p:cBhvr>
+                                      <p:to>
+                                        <p:strVal val="visible"/>
+                                      </p:to>
+                                    </p:set>
+                                    <p:animEffect transition="in" filter="fade">
+                                      <p:cBhvr>
+                                        <p:cTn id="27" dur="500"/>
+                                        <p:tgtEl>
+                                          <p:spTgt spid="10"/>
+                                        </p:tgtEl>
+                                      </p:cBhvr>
+                                    </p:animEffect>
+                                  </p:childTnLst>
+                                </p:cTn>
+                              </p:par>
+                            </p:childTnLst>
+                          </p:cTn>
+                        </p:par>
+                      </p:childTnLst>
+                    </p:cTn>
+                  </p:par>
+                </p:childTnLst>
+              </p:cTn>
+              <p:prevCondLst>
+                <p:cond evt="onPrev" delay="0">
+                  <p:tgtEl>
+                    <p:sldTgt/>
+                  </p:tgtEl>
+                </p:cond>
+              </p:prevCondLst>
+              <p:nextCondLst>
+                <p:cond evt="onNext" delay="0">
+                  <p:tgtEl>
+                    <p:sldTgt/>
+                  </p:tgtEl>
+                </p:cond>
+              </p:nextCondLst>
+            </p:seq>
+          </p:childTnLst>
+        </p:cTn>
+      </p:par>
+    </p:tnLst>
+    <p:bldLst>
+      <p:bldP spid="10" grpId="0"/>
+      <p:bldP spid="11" grpId="0"/>
+      <p:bldP spid="12" grpId="0"/>
+      <p:bldP spid="13" grpId="0"/>
+      <p:bldP spid="14" grpId="0"/>
+    </p:bldLst>
+  </p:timing>
+</p:sld>
+</file>
+
+<file path=ppt/slides/slide11.xml><?xml version="1.0" encoding="utf-8"?>
+<p:sld xmlns:a="http://schemas.openxmlformats.org/drawingml/2006/main" xmlns:r="http://schemas.openxmlformats.org/officeDocument/2006/relationships" xmlns:p="http://schemas.openxmlformats.org/presentationml/2006/main">
+  <p:cSld>
+    <p:bg>
+      <p:bgPr>
+        <a:solidFill>
+          <a:schemeClr val="tx1"/>
+        </a:solidFill>
+        <a:effectLst/>
+      </p:bgPr>
+    </p:bg>
+    <p:spTree>
+      <p:nvGrpSpPr>
+        <p:cNvPr id="1" name="">
+          <a:extLst>
+            <a:ext uri="{FF2B5EF4-FFF2-40B4-BE49-F238E27FC236}">
               <a16:creationId xmlns:a16="http://schemas.microsoft.com/office/drawing/2014/main" id="{47EC5E8A-3E1A-227D-A7BC-ADF20D0EFC98}"/>
             </a:ext>
           </a:extLst>
@@ -6229,13 +7528,13 @@
   <p:clrMapOvr>
     <a:masterClrMapping/>
   </p:clrMapOvr>
-  <mc:AlternateContent xmlns:mc="http://schemas.openxmlformats.org/markup-compatibility/2006">
-    <mc:Choice xmlns:p159="http://schemas.microsoft.com/office/powerpoint/2015/09/main" Requires="p159">
+  <mc:AlternateContent xmlns:mc="http://schemas.openxmlformats.org/markup-compatibility/2006" xmlns:p159="http://schemas.microsoft.com/office/powerpoint/2015/09/main">
+    <mc:Choice Requires="p159">
       <p:transition xmlns:p14="http://schemas.microsoft.com/office/powerpoint/2010/main" spd="slow" p14:dur="2000">
         <p159:morph option="byObject"/>
       </p:transition>
     </mc:Choice>
-    <mc:Fallback>
+    <mc:Fallback xmlns="">
       <p:transition spd="slow">
         <p:fade/>
       </p:transition>
@@ -6366,7 +7665,7 @@
 </p:sld>
 </file>
 
-<file path=ppt/slides/slide11.xml><?xml version="1.0" encoding="utf-8"?>
+<file path=ppt/slides/slide12.xml><?xml version="1.0" encoding="utf-8"?>
 <p:sld xmlns:a="http://schemas.openxmlformats.org/drawingml/2006/main" xmlns:r="http://schemas.openxmlformats.org/officeDocument/2006/relationships" xmlns:p="http://schemas.openxmlformats.org/presentationml/2006/main">
   <p:cSld>
     <p:bg>
@@ -7236,13 +8535,13 @@
   <p:clrMapOvr>
     <a:masterClrMapping/>
   </p:clrMapOvr>
-  <mc:AlternateContent xmlns:mc="http://schemas.openxmlformats.org/markup-compatibility/2006">
-    <mc:Choice xmlns:p159="http://schemas.microsoft.com/office/powerpoint/2015/09/main" Requires="p159">
+  <mc:AlternateContent xmlns:mc="http://schemas.openxmlformats.org/markup-compatibility/2006" xmlns:p159="http://schemas.microsoft.com/office/powerpoint/2015/09/main">
+    <mc:Choice Requires="p159">
       <p:transition xmlns:p14="http://schemas.microsoft.com/office/powerpoint/2010/main" spd="slow" p14:dur="2000">
         <p159:morph option="byObject"/>
       </p:transition>
     </mc:Choice>
-    <mc:Fallback>
+    <mc:Fallback xmlns="">
       <p:transition spd="slow">
         <p:fade/>
       </p:transition>
@@ -7373,7 +8672,7 @@
 </p:sld>
 </file>
 
-<file path=ppt/slides/slide12.xml><?xml version="1.0" encoding="utf-8"?>
+<file path=ppt/slides/slide13.xml><?xml version="1.0" encoding="utf-8"?>
 <p:sld xmlns:a="http://schemas.openxmlformats.org/drawingml/2006/main" xmlns:r="http://schemas.openxmlformats.org/officeDocument/2006/relationships" xmlns:p="http://schemas.openxmlformats.org/presentationml/2006/main">
   <p:cSld>
     <p:bg>
@@ -7448,8 +8747,8 @@
           </a:p>
         </p:txBody>
       </p:sp>
-      <mc:AlternateContent xmlns:mc="http://schemas.openxmlformats.org/markup-compatibility/2006">
-        <mc:Choice xmlns:a14="http://schemas.microsoft.com/office/drawing/2010/main" Requires="a14">
+      <mc:AlternateContent xmlns:mc="http://schemas.openxmlformats.org/markup-compatibility/2006" xmlns:a14="http://schemas.microsoft.com/office/drawing/2010/main">
+        <mc:Choice Requires="a14">
           <p:sp>
             <p:nvSpPr>
               <p:cNvPr id="4" name="TextBox 3">
@@ -7499,7 +8798,7 @@
             </p:txBody>
           </p:sp>
         </mc:Choice>
-        <mc:Fallback>
+        <mc:Fallback xmlns="">
           <p:sp>
             <p:nvSpPr>
               <p:cNvPr id="4" name="TextBox 3">
@@ -7544,8 +8843,8 @@
           </p:sp>
         </mc:Fallback>
       </mc:AlternateContent>
-      <mc:AlternateContent xmlns:mc="http://schemas.openxmlformats.org/markup-compatibility/2006">
-        <mc:Choice xmlns:a14="http://schemas.microsoft.com/office/drawing/2010/main" Requires="a14">
+      <mc:AlternateContent xmlns:mc="http://schemas.openxmlformats.org/markup-compatibility/2006" xmlns:a14="http://schemas.microsoft.com/office/drawing/2010/main">
+        <mc:Choice Requires="a14">
           <p:sp>
             <p:nvSpPr>
               <p:cNvPr id="8" name="TextBox 7">
@@ -7653,7 +8952,7 @@
             </p:txBody>
           </p:sp>
         </mc:Choice>
-        <mc:Fallback>
+        <mc:Fallback xmlns="">
           <p:sp>
             <p:nvSpPr>
               <p:cNvPr id="8" name="TextBox 7">
@@ -7703,8 +9002,8 @@
           </p:sp>
         </mc:Fallback>
       </mc:AlternateContent>
-      <mc:AlternateContent xmlns:mc="http://schemas.openxmlformats.org/markup-compatibility/2006">
-        <mc:Choice xmlns:a14="http://schemas.microsoft.com/office/drawing/2010/main" Requires="a14">
+      <mc:AlternateContent xmlns:mc="http://schemas.openxmlformats.org/markup-compatibility/2006" xmlns:a14="http://schemas.microsoft.com/office/drawing/2010/main">
+        <mc:Choice Requires="a14">
           <p:sp>
             <p:nvSpPr>
               <p:cNvPr id="10" name="TextBox 9">
@@ -7848,7 +9147,7 @@
             </p:txBody>
           </p:sp>
         </mc:Choice>
-        <mc:Fallback>
+        <mc:Fallback xmlns="">
           <p:sp>
             <p:nvSpPr>
               <p:cNvPr id="10" name="TextBox 9">
@@ -7898,8 +9197,8 @@
           </p:sp>
         </mc:Fallback>
       </mc:AlternateContent>
-      <mc:AlternateContent xmlns:mc="http://schemas.openxmlformats.org/markup-compatibility/2006">
-        <mc:Choice xmlns:a14="http://schemas.microsoft.com/office/drawing/2010/main" Requires="a14">
+      <mc:AlternateContent xmlns:mc="http://schemas.openxmlformats.org/markup-compatibility/2006" xmlns:a14="http://schemas.microsoft.com/office/drawing/2010/main">
+        <mc:Choice Requires="a14">
           <p:sp>
             <p:nvSpPr>
               <p:cNvPr id="11" name="TextBox 10">
@@ -8052,7 +9351,7 @@
             </p:txBody>
           </p:sp>
         </mc:Choice>
-        <mc:Fallback>
+        <mc:Fallback xmlns="">
           <p:sp>
             <p:nvSpPr>
               <p:cNvPr id="11" name="TextBox 10">
@@ -8102,8 +9401,8 @@
           </p:sp>
         </mc:Fallback>
       </mc:AlternateContent>
-      <mc:AlternateContent xmlns:mc="http://schemas.openxmlformats.org/markup-compatibility/2006">
-        <mc:Choice xmlns:a14="http://schemas.microsoft.com/office/drawing/2010/main" Requires="a14">
+      <mc:AlternateContent xmlns:mc="http://schemas.openxmlformats.org/markup-compatibility/2006" xmlns:a14="http://schemas.microsoft.com/office/drawing/2010/main">
+        <mc:Choice Requires="a14">
           <p:sp>
             <p:nvSpPr>
               <p:cNvPr id="12" name="TextBox 11">
@@ -8256,7 +9555,7 @@
             </p:txBody>
           </p:sp>
         </mc:Choice>
-        <mc:Fallback>
+        <mc:Fallback xmlns="">
           <p:sp>
             <p:nvSpPr>
               <p:cNvPr id="12" name="TextBox 11">
@@ -8306,8 +9605,8 @@
           </p:sp>
         </mc:Fallback>
       </mc:AlternateContent>
-      <mc:AlternateContent xmlns:mc="http://schemas.openxmlformats.org/markup-compatibility/2006">
-        <mc:Choice xmlns:a14="http://schemas.microsoft.com/office/drawing/2010/main" Requires="a14">
+      <mc:AlternateContent xmlns:mc="http://schemas.openxmlformats.org/markup-compatibility/2006" xmlns:a14="http://schemas.microsoft.com/office/drawing/2010/main">
+        <mc:Choice Requires="a14">
           <p:sp>
             <p:nvSpPr>
               <p:cNvPr id="13" name="TextBox 12">
@@ -8460,7 +9759,7 @@
             </p:txBody>
           </p:sp>
         </mc:Choice>
-        <mc:Fallback>
+        <mc:Fallback xmlns="">
           <p:sp>
             <p:nvSpPr>
               <p:cNvPr id="13" name="TextBox 12">
@@ -8744,8 +10043,8 @@
           </a:fontRef>
         </p:style>
       </p:cxnSp>
-      <mc:AlternateContent xmlns:mc="http://schemas.openxmlformats.org/markup-compatibility/2006">
-        <mc:Choice xmlns:a14="http://schemas.microsoft.com/office/drawing/2010/main" Requires="a14">
+      <mc:AlternateContent xmlns:mc="http://schemas.openxmlformats.org/markup-compatibility/2006" xmlns:a14="http://schemas.microsoft.com/office/drawing/2010/main">
+        <mc:Choice Requires="a14">
           <p:sp>
             <p:nvSpPr>
               <p:cNvPr id="67" name="TextBox 66">
@@ -8843,7 +10142,7 @@
             </p:txBody>
           </p:sp>
         </mc:Choice>
-        <mc:Fallback>
+        <mc:Fallback xmlns="">
           <p:sp>
             <p:nvSpPr>
               <p:cNvPr id="67" name="TextBox 66">
@@ -8891,8 +10190,8 @@
           </p:sp>
         </mc:Fallback>
       </mc:AlternateContent>
-      <mc:AlternateContent xmlns:mc="http://schemas.openxmlformats.org/markup-compatibility/2006">
-        <mc:Choice xmlns:a14="http://schemas.microsoft.com/office/drawing/2010/main" Requires="a14">
+      <mc:AlternateContent xmlns:mc="http://schemas.openxmlformats.org/markup-compatibility/2006" xmlns:a14="http://schemas.microsoft.com/office/drawing/2010/main">
+        <mc:Choice Requires="a14">
           <p:sp>
             <p:nvSpPr>
               <p:cNvPr id="74" name="TextBox 73">
@@ -8990,7 +10289,7 @@
             </p:txBody>
           </p:sp>
         </mc:Choice>
-        <mc:Fallback>
+        <mc:Fallback xmlns="">
           <p:sp>
             <p:nvSpPr>
               <p:cNvPr id="74" name="TextBox 73">
@@ -9038,8 +10337,8 @@
           </p:sp>
         </mc:Fallback>
       </mc:AlternateContent>
-      <mc:AlternateContent xmlns:mc="http://schemas.openxmlformats.org/markup-compatibility/2006">
-        <mc:Choice xmlns:a14="http://schemas.microsoft.com/office/drawing/2010/main" Requires="a14">
+      <mc:AlternateContent xmlns:mc="http://schemas.openxmlformats.org/markup-compatibility/2006" xmlns:a14="http://schemas.microsoft.com/office/drawing/2010/main">
+        <mc:Choice Requires="a14">
           <p:sp>
             <p:nvSpPr>
               <p:cNvPr id="103" name="TextBox 102">
@@ -9137,7 +10436,7 @@
             </p:txBody>
           </p:sp>
         </mc:Choice>
-        <mc:Fallback>
+        <mc:Fallback xmlns="">
           <p:sp>
             <p:nvSpPr>
               <p:cNvPr id="103" name="TextBox 102">
@@ -9185,8 +10484,8 @@
           </p:sp>
         </mc:Fallback>
       </mc:AlternateContent>
-      <mc:AlternateContent xmlns:mc="http://schemas.openxmlformats.org/markup-compatibility/2006">
-        <mc:Choice xmlns:a14="http://schemas.microsoft.com/office/drawing/2010/main" Requires="a14">
+      <mc:AlternateContent xmlns:mc="http://schemas.openxmlformats.org/markup-compatibility/2006" xmlns:a14="http://schemas.microsoft.com/office/drawing/2010/main">
+        <mc:Choice Requires="a14">
           <p:sp>
             <p:nvSpPr>
               <p:cNvPr id="104" name="TextBox 103">
@@ -9284,7 +10583,7 @@
             </p:txBody>
           </p:sp>
         </mc:Choice>
-        <mc:Fallback>
+        <mc:Fallback xmlns="">
           <p:sp>
             <p:nvSpPr>
               <p:cNvPr id="104" name="TextBox 103">
@@ -9672,13 +10971,13 @@
   <p:clrMapOvr>
     <a:masterClrMapping/>
   </p:clrMapOvr>
-  <mc:AlternateContent xmlns:mc="http://schemas.openxmlformats.org/markup-compatibility/2006">
-    <mc:Choice xmlns:p159="http://schemas.microsoft.com/office/powerpoint/2015/09/main" Requires="p159">
+  <mc:AlternateContent xmlns:mc="http://schemas.openxmlformats.org/markup-compatibility/2006" xmlns:p159="http://schemas.microsoft.com/office/powerpoint/2015/09/main">
+    <mc:Choice Requires="p159">
       <p:transition xmlns:p14="http://schemas.microsoft.com/office/powerpoint/2010/main" spd="slow" p14:dur="2000">
         <p159:morph option="byObject"/>
       </p:transition>
     </mc:Choice>
-    <mc:Fallback>
+    <mc:Fallback xmlns="">
       <p:transition spd="slow">
         <p:fade/>
       </p:transition>
@@ -13386,13 +14685,13 @@
   <p:clrMapOvr>
     <a:masterClrMapping/>
   </p:clrMapOvr>
-  <mc:AlternateContent xmlns:mc="http://schemas.openxmlformats.org/markup-compatibility/2006">
-    <mc:Choice xmlns:p159="http://schemas.microsoft.com/office/powerpoint/2015/09/main" Requires="p159">
+  <mc:AlternateContent xmlns:mc="http://schemas.openxmlformats.org/markup-compatibility/2006" xmlns:p159="http://schemas.microsoft.com/office/powerpoint/2015/09/main">
+    <mc:Choice Requires="p159">
       <p:transition xmlns:p14="http://schemas.microsoft.com/office/powerpoint/2010/main" spd="slow" p14:dur="2000">
         <p159:morph option="byObject"/>
       </p:transition>
     </mc:Choice>
-    <mc:Fallback>
+    <mc:Fallback xmlns="">
       <p:transition spd="slow">
         <p:fade/>
       </p:transition>
@@ -14899,13 +16198,13 @@
   <p:clrMapOvr>
     <a:masterClrMapping/>
   </p:clrMapOvr>
-  <mc:AlternateContent xmlns:mc="http://schemas.openxmlformats.org/markup-compatibility/2006">
-    <mc:Choice xmlns:p159="http://schemas.microsoft.com/office/powerpoint/2015/09/main" Requires="p159">
+  <mc:AlternateContent xmlns:mc="http://schemas.openxmlformats.org/markup-compatibility/2006" xmlns:p159="http://schemas.microsoft.com/office/powerpoint/2015/09/main">
+    <mc:Choice Requires="p159">
       <p:transition xmlns:p14="http://schemas.microsoft.com/office/powerpoint/2010/main" spd="slow" p14:dur="2000">
         <p159:morph option="byObject"/>
       </p:transition>
     </mc:Choice>
-    <mc:Fallback>
+    <mc:Fallback xmlns="">
       <p:transition spd="slow">
         <p:fade/>
       </p:transition>
@@ -16690,13 +17989,13 @@
   <p:clrMapOvr>
     <a:masterClrMapping/>
   </p:clrMapOvr>
-  <mc:AlternateContent xmlns:mc="http://schemas.openxmlformats.org/markup-compatibility/2006">
-    <mc:Choice xmlns:p159="http://schemas.microsoft.com/office/powerpoint/2015/09/main" Requires="p159">
+  <mc:AlternateContent xmlns:mc="http://schemas.openxmlformats.org/markup-compatibility/2006" xmlns:p159="http://schemas.microsoft.com/office/powerpoint/2015/09/main">
+    <mc:Choice Requires="p159">
       <p:transition xmlns:p14="http://schemas.microsoft.com/office/powerpoint/2010/main" spd="slow" p14:dur="2000">
         <p159:morph option="byObject"/>
       </p:transition>
     </mc:Choice>
-    <mc:Fallback>
+    <mc:Fallback xmlns="">
       <p:transition spd="slow">
         <p:fade/>
       </p:transition>
@@ -18401,13 +19700,13 @@
   <p:clrMapOvr>
     <a:masterClrMapping/>
   </p:clrMapOvr>
-  <mc:AlternateContent xmlns:mc="http://schemas.openxmlformats.org/markup-compatibility/2006">
-    <mc:Choice xmlns:p159="http://schemas.microsoft.com/office/powerpoint/2015/09/main" Requires="p159">
+  <mc:AlternateContent xmlns:mc="http://schemas.openxmlformats.org/markup-compatibility/2006" xmlns:p159="http://schemas.microsoft.com/office/powerpoint/2015/09/main">
+    <mc:Choice Requires="p159">
       <p:transition xmlns:p14="http://schemas.microsoft.com/office/powerpoint/2010/main" spd="slow" p14:dur="2000">
         <p159:morph option="byObject"/>
       </p:transition>
     </mc:Choice>
-    <mc:Fallback>
+    <mc:Fallback xmlns="">
       <p:transition spd="slow">
         <p:fade/>
       </p:transition>
@@ -19556,13 +20855,13 @@
   <p:clrMapOvr>
     <a:masterClrMapping/>
   </p:clrMapOvr>
-  <mc:AlternateContent xmlns:mc="http://schemas.openxmlformats.org/markup-compatibility/2006">
-    <mc:Choice xmlns:p159="http://schemas.microsoft.com/office/powerpoint/2015/09/main" Requires="p159">
+  <mc:AlternateContent xmlns:mc="http://schemas.openxmlformats.org/markup-compatibility/2006" xmlns:p159="http://schemas.microsoft.com/office/powerpoint/2015/09/main">
+    <mc:Choice Requires="p159">
       <p:transition xmlns:p14="http://schemas.microsoft.com/office/powerpoint/2010/main" spd="slow" p14:dur="2000">
         <p159:morph option="byObject"/>
       </p:transition>
     </mc:Choice>
-    <mc:Fallback>
+    <mc:Fallback xmlns="">
       <p:transition spd="slow">
         <p:fade/>
       </p:transition>
@@ -20620,13 +21919,13 @@
   <p:clrMapOvr>
     <a:masterClrMapping/>
   </p:clrMapOvr>
-  <mc:AlternateContent xmlns:mc="http://schemas.openxmlformats.org/markup-compatibility/2006">
-    <mc:Choice xmlns:p159="http://schemas.microsoft.com/office/powerpoint/2015/09/main" Requires="p159">
+  <mc:AlternateContent xmlns:mc="http://schemas.openxmlformats.org/markup-compatibility/2006" xmlns:p159="http://schemas.microsoft.com/office/powerpoint/2015/09/main">
+    <mc:Choice Requires="p159">
       <p:transition xmlns:p14="http://schemas.microsoft.com/office/powerpoint/2010/main" spd="slow" p14:dur="2000">
         <p159:morph option="byObject"/>
       </p:transition>
     </mc:Choice>
-    <mc:Fallback>
+    <mc:Fallback xmlns="">
       <p:transition spd="slow">
         <p:fade/>
       </p:transition>
@@ -20857,7 +22156,7 @@
                   <a:srgbClr val="00B050"/>
                 </a:solidFill>
               </a:rPr>
-              <a:t>Recursion Example: Factorial	</a:t>
+              <a:t>Why use Recursion?</a:t>
             </a:r>
             <a:endParaRPr lang="en-PH" dirty="0">
               <a:solidFill>
@@ -20867,789 +22166,162 @@
           </a:p>
         </p:txBody>
       </p:sp>
-      <mc:AlternateContent xmlns:mc="http://schemas.openxmlformats.org/markup-compatibility/2006">
-        <mc:Choice xmlns:a14="http://schemas.microsoft.com/office/drawing/2010/main" Requires="a14">
-          <p:sp>
-            <p:nvSpPr>
-              <p:cNvPr id="10" name="TextBox 9">
-                <a:extLst>
-                  <a:ext uri="{FF2B5EF4-FFF2-40B4-BE49-F238E27FC236}">
-                    <a16:creationId xmlns:a16="http://schemas.microsoft.com/office/drawing/2014/main" id="{F1435E1D-5CEB-BF5D-0625-3E2331E89570}"/>
-                  </a:ext>
-                </a:extLst>
-              </p:cNvPr>
-              <p:cNvSpPr txBox="1"/>
-              <p:nvPr/>
-            </p:nvSpPr>
-            <p:spPr>
-              <a:xfrm>
-                <a:off x="2743200" y="5009631"/>
-                <a:ext cx="6705600" cy="861774"/>
-              </a:xfrm>
-              <a:prstGeom prst="rect">
-                <a:avLst/>
-              </a:prstGeom>
-              <a:noFill/>
-            </p:spPr>
-            <p:txBody>
-              <a:bodyPr wrap="square">
-                <a:spAutoFit/>
-              </a:bodyPr>
-              <a:lstStyle/>
-              <a:p>
-                <a:pPr algn="ctr"/>
-                <a14:m>
-                  <m:oMathPara xmlns:m="http://schemas.openxmlformats.org/officeDocument/2006/math">
-                    <m:oMathParaPr>
-                      <m:jc m:val="centerGroup"/>
-                    </m:oMathParaPr>
-                    <m:oMath xmlns:m="http://schemas.openxmlformats.org/officeDocument/2006/math">
-                      <m:r>
-                        <a:rPr lang="en-PH" sz="5000" b="1" i="1" dirty="0" smtClean="0">
-                          <a:solidFill>
-                            <a:schemeClr val="bg1"/>
-                          </a:solidFill>
-                          <a:latin typeface="Cambria Math" panose="02040503050406030204" pitchFamily="18" charset="0"/>
-                        </a:rPr>
-                        <m:t>𝟓</m:t>
-                      </m:r>
-                      <m:r>
-                        <a:rPr lang="en-PH" sz="5000" b="1" i="1" dirty="0" smtClean="0">
-                          <a:solidFill>
-                            <a:schemeClr val="bg1"/>
-                          </a:solidFill>
-                          <a:latin typeface="Cambria Math" panose="02040503050406030204" pitchFamily="18" charset="0"/>
-                        </a:rPr>
-                        <m:t>!=</m:t>
-                      </m:r>
-                      <m:r>
-                        <a:rPr lang="en-PH" sz="5000" b="1" i="1" dirty="0" smtClean="0">
-                          <a:solidFill>
-                            <a:schemeClr val="bg1"/>
-                          </a:solidFill>
-                          <a:latin typeface="Cambria Math" panose="02040503050406030204" pitchFamily="18" charset="0"/>
-                        </a:rPr>
-                        <m:t>𝟓</m:t>
-                      </m:r>
-                      <m:r>
-                        <a:rPr lang="en-PH" sz="5000" b="1" i="1" dirty="0" smtClean="0">
-                          <a:solidFill>
-                            <a:schemeClr val="bg1"/>
-                          </a:solidFill>
-                          <a:latin typeface="Cambria Math" panose="02040503050406030204" pitchFamily="18" charset="0"/>
-                        </a:rPr>
-                        <m:t> ×</m:t>
-                      </m:r>
-                      <m:r>
-                        <a:rPr lang="en-PH" sz="5000" b="1" i="1" dirty="0" smtClean="0">
-                          <a:solidFill>
-                            <a:schemeClr val="bg1"/>
-                          </a:solidFill>
-                          <a:latin typeface="Cambria Math" panose="02040503050406030204" pitchFamily="18" charset="0"/>
-                          <a:ea typeface="Cambria Math" panose="02040503050406030204" pitchFamily="18" charset="0"/>
-                        </a:rPr>
-                        <m:t>𝟒</m:t>
-                      </m:r>
-                      <m:r>
-                        <a:rPr lang="en-PH" sz="5000" b="1" i="1" dirty="0" smtClean="0">
-                          <a:solidFill>
-                            <a:schemeClr val="bg1"/>
-                          </a:solidFill>
-                          <a:latin typeface="Cambria Math" panose="02040503050406030204" pitchFamily="18" charset="0"/>
-                          <a:ea typeface="Cambria Math" panose="02040503050406030204" pitchFamily="18" charset="0"/>
-                        </a:rPr>
-                        <m:t>×</m:t>
-                      </m:r>
-                      <m:r>
-                        <a:rPr lang="en-PH" sz="5000" b="1" i="1" dirty="0" smtClean="0">
-                          <a:solidFill>
-                            <a:schemeClr val="bg1"/>
-                          </a:solidFill>
-                          <a:latin typeface="Cambria Math" panose="02040503050406030204" pitchFamily="18" charset="0"/>
-                          <a:ea typeface="Cambria Math" panose="02040503050406030204" pitchFamily="18" charset="0"/>
-                        </a:rPr>
-                        <m:t>𝟑</m:t>
-                      </m:r>
-                      <m:r>
-                        <a:rPr lang="en-PH" sz="5000" b="1" i="1" dirty="0">
-                          <a:solidFill>
-                            <a:schemeClr val="bg1"/>
-                          </a:solidFill>
-                          <a:latin typeface="Cambria Math" panose="02040503050406030204" pitchFamily="18" charset="0"/>
-                          <a:ea typeface="Cambria Math" panose="02040503050406030204" pitchFamily="18" charset="0"/>
-                        </a:rPr>
-                        <m:t>×</m:t>
-                      </m:r>
-                      <m:r>
-                        <a:rPr lang="en-PH" sz="5000" b="1" i="1" dirty="0" smtClean="0">
-                          <a:solidFill>
-                            <a:schemeClr val="bg1"/>
-                          </a:solidFill>
-                          <a:latin typeface="Cambria Math" panose="02040503050406030204" pitchFamily="18" charset="0"/>
-                          <a:ea typeface="Cambria Math" panose="02040503050406030204" pitchFamily="18" charset="0"/>
-                        </a:rPr>
-                        <m:t>𝟐</m:t>
-                      </m:r>
-                      <m:r>
-                        <a:rPr lang="en-PH" sz="5000" b="1" i="1" dirty="0">
-                          <a:solidFill>
-                            <a:schemeClr val="bg1"/>
-                          </a:solidFill>
-                          <a:latin typeface="Cambria Math" panose="02040503050406030204" pitchFamily="18" charset="0"/>
-                          <a:ea typeface="Cambria Math" panose="02040503050406030204" pitchFamily="18" charset="0"/>
-                        </a:rPr>
-                        <m:t>×</m:t>
-                      </m:r>
-                      <m:r>
-                        <a:rPr lang="en-PH" sz="5000" b="1" i="1" dirty="0" smtClean="0">
-                          <a:solidFill>
-                            <a:schemeClr val="bg1"/>
-                          </a:solidFill>
-                          <a:latin typeface="Cambria Math" panose="02040503050406030204" pitchFamily="18" charset="0"/>
-                          <a:ea typeface="Cambria Math" panose="02040503050406030204" pitchFamily="18" charset="0"/>
-                        </a:rPr>
-                        <m:t>𝟏</m:t>
-                      </m:r>
-                    </m:oMath>
-                  </m:oMathPara>
-                </a14:m>
-              </a:p>
-            </p:txBody>
-          </p:sp>
-        </mc:Choice>
-        <mc:Fallback>
-          <p:sp>
-            <p:nvSpPr>
-              <p:cNvPr id="10" name="TextBox 9">
-                <a:extLst>
-                  <a:ext uri="{FF2B5EF4-FFF2-40B4-BE49-F238E27FC236}">
-                    <a16:creationId xmlns:a16="http://schemas.microsoft.com/office/drawing/2014/main" id="{F1435E1D-5CEB-BF5D-0625-3E2331E89570}"/>
-                  </a:ext>
-                </a:extLst>
-              </p:cNvPr>
-              <p:cNvSpPr txBox="1">
-                <a:spLocks noRot="1" noChangeAspect="1" noMove="1" noResize="1" noEditPoints="1" noAdjustHandles="1" noChangeArrowheads="1" noChangeShapeType="1" noTextEdit="1"/>
-              </p:cNvSpPr>
-              <p:nvPr/>
-            </p:nvSpPr>
-            <p:spPr>
-              <a:xfrm>
-                <a:off x="2743200" y="5009631"/>
-                <a:ext cx="6705600" cy="861774"/>
-              </a:xfrm>
-              <a:prstGeom prst="rect">
-                <a:avLst/>
-              </a:prstGeom>
-              <a:blipFill>
-                <a:blip r:embed="rId3"/>
-                <a:stretch>
-                  <a:fillRect/>
-                </a:stretch>
-              </a:blipFill>
-            </p:spPr>
-            <p:txBody>
-              <a:bodyPr/>
-              <a:lstStyle/>
-              <a:p>
-                <a:r>
-                  <a:rPr lang="en-PH">
-                    <a:noFill/>
-                  </a:rPr>
-                  <a:t> </a:t>
-                </a:r>
-              </a:p>
-            </p:txBody>
-          </p:sp>
-        </mc:Fallback>
-      </mc:AlternateContent>
-      <mc:AlternateContent xmlns:mc="http://schemas.openxmlformats.org/markup-compatibility/2006">
-        <mc:Choice xmlns:a14="http://schemas.microsoft.com/office/drawing/2010/main" Requires="a14">
-          <p:sp>
-            <p:nvSpPr>
-              <p:cNvPr id="11" name="TextBox 10">
-                <a:extLst>
-                  <a:ext uri="{FF2B5EF4-FFF2-40B4-BE49-F238E27FC236}">
-                    <a16:creationId xmlns:a16="http://schemas.microsoft.com/office/drawing/2014/main" id="{DDC72801-443C-C450-3A45-9D8835C90FAE}"/>
-                  </a:ext>
-                </a:extLst>
-              </p:cNvPr>
-              <p:cNvSpPr txBox="1"/>
-              <p:nvPr/>
-            </p:nvSpPr>
-            <p:spPr>
-              <a:xfrm>
-                <a:off x="2743200" y="3215527"/>
-                <a:ext cx="6705600" cy="861774"/>
-              </a:xfrm>
-              <a:prstGeom prst="rect">
-                <a:avLst/>
-              </a:prstGeom>
-              <a:noFill/>
-            </p:spPr>
-            <p:txBody>
-              <a:bodyPr wrap="square">
-                <a:spAutoFit/>
-              </a:bodyPr>
-              <a:lstStyle/>
-              <a:p>
-                <a:pPr algn="ctr"/>
-                <a14:m>
-                  <m:oMathPara xmlns:m="http://schemas.openxmlformats.org/officeDocument/2006/math">
-                    <m:oMathParaPr>
-                      <m:jc m:val="centerGroup"/>
-                    </m:oMathParaPr>
-                    <m:oMath xmlns:m="http://schemas.openxmlformats.org/officeDocument/2006/math">
-                      <m:r>
-                        <a:rPr lang="en-PH" sz="5000" b="1" i="0" dirty="0" smtClean="0">
-                          <a:solidFill>
-                            <a:schemeClr val="bg1"/>
-                          </a:solidFill>
-                          <a:latin typeface="Cambria Math" panose="02040503050406030204" pitchFamily="18" charset="0"/>
-                        </a:rPr>
-                        <m:t>𝟑</m:t>
-                      </m:r>
-                      <m:r>
-                        <a:rPr lang="en-PH" sz="5000" b="1" i="1" dirty="0" smtClean="0">
-                          <a:solidFill>
-                            <a:schemeClr val="bg1"/>
-                          </a:solidFill>
-                          <a:latin typeface="Cambria Math" panose="02040503050406030204" pitchFamily="18" charset="0"/>
-                        </a:rPr>
-                        <m:t>!=</m:t>
-                      </m:r>
-                      <m:r>
-                        <a:rPr lang="en-PH" sz="5000" b="1" i="1" dirty="0" smtClean="0">
-                          <a:solidFill>
-                            <a:schemeClr val="bg1"/>
-                          </a:solidFill>
-                          <a:latin typeface="Cambria Math" panose="02040503050406030204" pitchFamily="18" charset="0"/>
-                          <a:ea typeface="Cambria Math" panose="02040503050406030204" pitchFamily="18" charset="0"/>
-                        </a:rPr>
-                        <m:t>𝟑</m:t>
-                      </m:r>
-                      <m:r>
-                        <a:rPr lang="en-PH" sz="5000" b="1" i="1" dirty="0">
-                          <a:solidFill>
-                            <a:schemeClr val="bg1"/>
-                          </a:solidFill>
-                          <a:latin typeface="Cambria Math" panose="02040503050406030204" pitchFamily="18" charset="0"/>
-                          <a:ea typeface="Cambria Math" panose="02040503050406030204" pitchFamily="18" charset="0"/>
-                        </a:rPr>
-                        <m:t>×</m:t>
-                      </m:r>
-                      <m:r>
-                        <a:rPr lang="en-PH" sz="5000" b="1" i="1" dirty="0" smtClean="0">
-                          <a:solidFill>
-                            <a:schemeClr val="bg1"/>
-                          </a:solidFill>
-                          <a:latin typeface="Cambria Math" panose="02040503050406030204" pitchFamily="18" charset="0"/>
-                          <a:ea typeface="Cambria Math" panose="02040503050406030204" pitchFamily="18" charset="0"/>
-                        </a:rPr>
-                        <m:t>𝟐</m:t>
-                      </m:r>
-                      <m:r>
-                        <a:rPr lang="en-PH" sz="5000" b="1" i="1" dirty="0">
-                          <a:solidFill>
-                            <a:schemeClr val="bg1"/>
-                          </a:solidFill>
-                          <a:latin typeface="Cambria Math" panose="02040503050406030204" pitchFamily="18" charset="0"/>
-                          <a:ea typeface="Cambria Math" panose="02040503050406030204" pitchFamily="18" charset="0"/>
-                        </a:rPr>
-                        <m:t>×</m:t>
-                      </m:r>
-                      <m:r>
-                        <a:rPr lang="en-PH" sz="5000" b="1" i="1" dirty="0" smtClean="0">
-                          <a:solidFill>
-                            <a:schemeClr val="bg1"/>
-                          </a:solidFill>
-                          <a:latin typeface="Cambria Math" panose="02040503050406030204" pitchFamily="18" charset="0"/>
-                          <a:ea typeface="Cambria Math" panose="02040503050406030204" pitchFamily="18" charset="0"/>
-                        </a:rPr>
-                        <m:t>𝟏</m:t>
-                      </m:r>
-                    </m:oMath>
-                  </m:oMathPara>
-                </a14:m>
-              </a:p>
-            </p:txBody>
-          </p:sp>
-        </mc:Choice>
-        <mc:Fallback>
-          <p:sp>
-            <p:nvSpPr>
-              <p:cNvPr id="11" name="TextBox 10">
-                <a:extLst>
-                  <a:ext uri="{FF2B5EF4-FFF2-40B4-BE49-F238E27FC236}">
-                    <a16:creationId xmlns:a16="http://schemas.microsoft.com/office/drawing/2014/main" id="{DDC72801-443C-C450-3A45-9D8835C90FAE}"/>
-                  </a:ext>
-                </a:extLst>
-              </p:cNvPr>
-              <p:cNvSpPr txBox="1">
-                <a:spLocks noRot="1" noChangeAspect="1" noMove="1" noResize="1" noEditPoints="1" noAdjustHandles="1" noChangeArrowheads="1" noChangeShapeType="1" noTextEdit="1"/>
-              </p:cNvSpPr>
-              <p:nvPr/>
-            </p:nvSpPr>
-            <p:spPr>
-              <a:xfrm>
-                <a:off x="2743200" y="3215527"/>
-                <a:ext cx="6705600" cy="861774"/>
-              </a:xfrm>
-              <a:prstGeom prst="rect">
-                <a:avLst/>
-              </a:prstGeom>
-              <a:blipFill>
-                <a:blip r:embed="rId4"/>
-                <a:stretch>
-                  <a:fillRect/>
-                </a:stretch>
-              </a:blipFill>
-            </p:spPr>
-            <p:txBody>
-              <a:bodyPr/>
-              <a:lstStyle/>
-              <a:p>
-                <a:r>
-                  <a:rPr lang="en-PH">
-                    <a:noFill/>
-                  </a:rPr>
-                  <a:t> </a:t>
-                </a:r>
-              </a:p>
-            </p:txBody>
-          </p:sp>
-        </mc:Fallback>
-      </mc:AlternateContent>
-      <mc:AlternateContent xmlns:mc="http://schemas.openxmlformats.org/markup-compatibility/2006">
-        <mc:Choice xmlns:a14="http://schemas.microsoft.com/office/drawing/2010/main" Requires="a14">
-          <p:sp>
-            <p:nvSpPr>
-              <p:cNvPr id="12" name="TextBox 11">
-                <a:extLst>
-                  <a:ext uri="{FF2B5EF4-FFF2-40B4-BE49-F238E27FC236}">
-                    <a16:creationId xmlns:a16="http://schemas.microsoft.com/office/drawing/2014/main" id="{D5F92A94-3E48-D61A-1374-D994C1E81BC7}"/>
-                  </a:ext>
-                </a:extLst>
-              </p:cNvPr>
-              <p:cNvSpPr txBox="1"/>
-              <p:nvPr/>
-            </p:nvSpPr>
-            <p:spPr>
-              <a:xfrm>
-                <a:off x="2743200" y="2353753"/>
-                <a:ext cx="6705600" cy="861774"/>
-              </a:xfrm>
-              <a:prstGeom prst="rect">
-                <a:avLst/>
-              </a:prstGeom>
-              <a:noFill/>
-            </p:spPr>
-            <p:txBody>
-              <a:bodyPr wrap="square">
-                <a:spAutoFit/>
-              </a:bodyPr>
-              <a:lstStyle/>
-              <a:p>
-                <a:pPr algn="ctr"/>
-                <a14:m>
-                  <m:oMathPara xmlns:m="http://schemas.openxmlformats.org/officeDocument/2006/math">
-                    <m:oMathParaPr>
-                      <m:jc m:val="centerGroup"/>
-                    </m:oMathParaPr>
-                    <m:oMath xmlns:m="http://schemas.openxmlformats.org/officeDocument/2006/math">
-                      <m:r>
-                        <a:rPr lang="en-PH" sz="5000" b="1" i="0" dirty="0" smtClean="0">
-                          <a:solidFill>
-                            <a:schemeClr val="bg1"/>
-                          </a:solidFill>
-                          <a:latin typeface="Cambria Math" panose="02040503050406030204" pitchFamily="18" charset="0"/>
-                        </a:rPr>
-                        <m:t>𝟐</m:t>
-                      </m:r>
-                      <m:r>
-                        <a:rPr lang="en-PH" sz="5000" b="1" i="1" dirty="0" smtClean="0">
-                          <a:solidFill>
-                            <a:schemeClr val="bg1"/>
-                          </a:solidFill>
-                          <a:latin typeface="Cambria Math" panose="02040503050406030204" pitchFamily="18" charset="0"/>
-                        </a:rPr>
-                        <m:t>!=</m:t>
-                      </m:r>
-                      <m:r>
-                        <a:rPr lang="en-PH" sz="5000" b="1" i="1" dirty="0" smtClean="0">
-                          <a:solidFill>
-                            <a:schemeClr val="bg1"/>
-                          </a:solidFill>
-                          <a:latin typeface="Cambria Math" panose="02040503050406030204" pitchFamily="18" charset="0"/>
-                          <a:ea typeface="Cambria Math" panose="02040503050406030204" pitchFamily="18" charset="0"/>
-                        </a:rPr>
-                        <m:t>𝟐</m:t>
-                      </m:r>
-                      <m:r>
-                        <a:rPr lang="en-PH" sz="5000" b="1" i="1" dirty="0">
-                          <a:solidFill>
-                            <a:schemeClr val="bg1"/>
-                          </a:solidFill>
-                          <a:latin typeface="Cambria Math" panose="02040503050406030204" pitchFamily="18" charset="0"/>
-                          <a:ea typeface="Cambria Math" panose="02040503050406030204" pitchFamily="18" charset="0"/>
-                        </a:rPr>
-                        <m:t>×</m:t>
-                      </m:r>
-                      <m:r>
-                        <a:rPr lang="en-PH" sz="5000" b="1" i="1" dirty="0" smtClean="0">
-                          <a:solidFill>
-                            <a:schemeClr val="bg1"/>
-                          </a:solidFill>
-                          <a:latin typeface="Cambria Math" panose="02040503050406030204" pitchFamily="18" charset="0"/>
-                          <a:ea typeface="Cambria Math" panose="02040503050406030204" pitchFamily="18" charset="0"/>
-                        </a:rPr>
-                        <m:t>𝟏</m:t>
-                      </m:r>
-                    </m:oMath>
-                  </m:oMathPara>
-                </a14:m>
-              </a:p>
-            </p:txBody>
-          </p:sp>
-        </mc:Choice>
-        <mc:Fallback>
-          <p:sp>
-            <p:nvSpPr>
-              <p:cNvPr id="12" name="TextBox 11">
-                <a:extLst>
-                  <a:ext uri="{FF2B5EF4-FFF2-40B4-BE49-F238E27FC236}">
-                    <a16:creationId xmlns:a16="http://schemas.microsoft.com/office/drawing/2014/main" id="{D5F92A94-3E48-D61A-1374-D994C1E81BC7}"/>
-                  </a:ext>
-                </a:extLst>
-              </p:cNvPr>
-              <p:cNvSpPr txBox="1">
-                <a:spLocks noRot="1" noChangeAspect="1" noMove="1" noResize="1" noEditPoints="1" noAdjustHandles="1" noChangeArrowheads="1" noChangeShapeType="1" noTextEdit="1"/>
-              </p:cNvSpPr>
-              <p:nvPr/>
-            </p:nvSpPr>
-            <p:spPr>
-              <a:xfrm>
-                <a:off x="2743200" y="2353753"/>
-                <a:ext cx="6705600" cy="861774"/>
-              </a:xfrm>
-              <a:prstGeom prst="rect">
-                <a:avLst/>
-              </a:prstGeom>
-              <a:blipFill>
-                <a:blip r:embed="rId5"/>
-                <a:stretch>
-                  <a:fillRect/>
-                </a:stretch>
-              </a:blipFill>
-            </p:spPr>
-            <p:txBody>
-              <a:bodyPr/>
-              <a:lstStyle/>
-              <a:p>
-                <a:r>
-                  <a:rPr lang="en-PH">
-                    <a:noFill/>
-                  </a:rPr>
-                  <a:t> </a:t>
-                </a:r>
-              </a:p>
-            </p:txBody>
-          </p:sp>
-        </mc:Fallback>
-      </mc:AlternateContent>
-      <mc:AlternateContent xmlns:mc="http://schemas.openxmlformats.org/markup-compatibility/2006">
-        <mc:Choice xmlns:a14="http://schemas.microsoft.com/office/drawing/2010/main" Requires="a14">
-          <p:sp>
-            <p:nvSpPr>
-              <p:cNvPr id="13" name="TextBox 12">
-                <a:extLst>
-                  <a:ext uri="{FF2B5EF4-FFF2-40B4-BE49-F238E27FC236}">
-                    <a16:creationId xmlns:a16="http://schemas.microsoft.com/office/drawing/2014/main" id="{BC12F2D2-5B4B-E9E0-A5D9-8A0FE3A187C0}"/>
-                  </a:ext>
-                </a:extLst>
-              </p:cNvPr>
-              <p:cNvSpPr txBox="1"/>
-              <p:nvPr/>
-            </p:nvSpPr>
-            <p:spPr>
-              <a:xfrm>
-                <a:off x="2743200" y="1491979"/>
-                <a:ext cx="6705600" cy="861774"/>
-              </a:xfrm>
-              <a:prstGeom prst="rect">
-                <a:avLst/>
-              </a:prstGeom>
-              <a:noFill/>
-            </p:spPr>
-            <p:txBody>
-              <a:bodyPr wrap="square">
-                <a:spAutoFit/>
-              </a:bodyPr>
-              <a:lstStyle/>
-              <a:p>
-                <a:pPr algn="ctr"/>
-                <a14:m>
-                  <m:oMathPara xmlns:m="http://schemas.openxmlformats.org/officeDocument/2006/math">
-                    <m:oMathParaPr>
-                      <m:jc m:val="centerGroup"/>
-                    </m:oMathParaPr>
-                    <m:oMath xmlns:m="http://schemas.openxmlformats.org/officeDocument/2006/math">
-                      <m:r>
-                        <a:rPr lang="en-PH" sz="5000" b="1" i="0" dirty="0" smtClean="0">
-                          <a:solidFill>
-                            <a:schemeClr val="bg1"/>
-                          </a:solidFill>
-                          <a:latin typeface="Cambria Math" panose="02040503050406030204" pitchFamily="18" charset="0"/>
-                        </a:rPr>
-                        <m:t>𝟏</m:t>
-                      </m:r>
-                      <m:r>
-                        <a:rPr lang="en-PH" sz="5000" b="1" i="1" dirty="0" smtClean="0">
-                          <a:solidFill>
-                            <a:schemeClr val="bg1"/>
-                          </a:solidFill>
-                          <a:latin typeface="Cambria Math" panose="02040503050406030204" pitchFamily="18" charset="0"/>
-                        </a:rPr>
-                        <m:t>!=</m:t>
-                      </m:r>
-                      <m:r>
-                        <a:rPr lang="en-PH" sz="5000" b="1" i="1" dirty="0" smtClean="0">
-                          <a:solidFill>
-                            <a:schemeClr val="bg1"/>
-                          </a:solidFill>
-                          <a:latin typeface="Cambria Math" panose="02040503050406030204" pitchFamily="18" charset="0"/>
-                          <a:ea typeface="Cambria Math" panose="02040503050406030204" pitchFamily="18" charset="0"/>
-                        </a:rPr>
-                        <m:t>𝟏</m:t>
-                      </m:r>
-                    </m:oMath>
-                  </m:oMathPara>
-                </a14:m>
-              </a:p>
-            </p:txBody>
-          </p:sp>
-        </mc:Choice>
-        <mc:Fallback>
-          <p:sp>
-            <p:nvSpPr>
-              <p:cNvPr id="13" name="TextBox 12">
-                <a:extLst>
-                  <a:ext uri="{FF2B5EF4-FFF2-40B4-BE49-F238E27FC236}">
-                    <a16:creationId xmlns:a16="http://schemas.microsoft.com/office/drawing/2014/main" id="{BC12F2D2-5B4B-E9E0-A5D9-8A0FE3A187C0}"/>
-                  </a:ext>
-                </a:extLst>
-              </p:cNvPr>
-              <p:cNvSpPr txBox="1">
-                <a:spLocks noRot="1" noChangeAspect="1" noMove="1" noResize="1" noEditPoints="1" noAdjustHandles="1" noChangeArrowheads="1" noChangeShapeType="1" noTextEdit="1"/>
-              </p:cNvSpPr>
-              <p:nvPr/>
-            </p:nvSpPr>
-            <p:spPr>
-              <a:xfrm>
-                <a:off x="2743200" y="1491979"/>
-                <a:ext cx="6705600" cy="861774"/>
-              </a:xfrm>
-              <a:prstGeom prst="rect">
-                <a:avLst/>
-              </a:prstGeom>
-              <a:blipFill>
-                <a:blip r:embed="rId6"/>
-                <a:stretch>
-                  <a:fillRect/>
-                </a:stretch>
-              </a:blipFill>
-            </p:spPr>
-            <p:txBody>
-              <a:bodyPr/>
-              <a:lstStyle/>
-              <a:p>
-                <a:r>
-                  <a:rPr lang="en-PH">
-                    <a:noFill/>
-                  </a:rPr>
-                  <a:t> </a:t>
-                </a:r>
-              </a:p>
-            </p:txBody>
-          </p:sp>
-        </mc:Fallback>
-      </mc:AlternateContent>
-      <mc:AlternateContent xmlns:mc="http://schemas.openxmlformats.org/markup-compatibility/2006">
-        <mc:Choice xmlns:a14="http://schemas.microsoft.com/office/drawing/2010/main" Requires="a14">
-          <p:sp>
-            <p:nvSpPr>
-              <p:cNvPr id="14" name="TextBox 13">
-                <a:extLst>
-                  <a:ext uri="{FF2B5EF4-FFF2-40B4-BE49-F238E27FC236}">
-                    <a16:creationId xmlns:a16="http://schemas.microsoft.com/office/drawing/2014/main" id="{C1193C3E-2D72-75B0-3A6D-8FCF8D69D33C}"/>
-                  </a:ext>
-                </a:extLst>
-              </p:cNvPr>
-              <p:cNvSpPr txBox="1"/>
-              <p:nvPr/>
-            </p:nvSpPr>
-            <p:spPr>
-              <a:xfrm>
-                <a:off x="2743200" y="4112579"/>
-                <a:ext cx="6705600" cy="861774"/>
-              </a:xfrm>
-              <a:prstGeom prst="rect">
-                <a:avLst/>
-              </a:prstGeom>
-              <a:noFill/>
-            </p:spPr>
-            <p:txBody>
-              <a:bodyPr wrap="square">
-                <a:spAutoFit/>
-              </a:bodyPr>
-              <a:lstStyle/>
-              <a:p>
-                <a:pPr algn="ctr"/>
-                <a14:m>
-                  <m:oMathPara xmlns:m="http://schemas.openxmlformats.org/officeDocument/2006/math">
-                    <m:oMathParaPr>
-                      <m:jc m:val="centerGroup"/>
-                    </m:oMathParaPr>
-                    <m:oMath xmlns:m="http://schemas.openxmlformats.org/officeDocument/2006/math">
-                      <m:r>
-                        <a:rPr lang="en-PH" sz="5000" b="1" i="1" dirty="0" smtClean="0">
-                          <a:solidFill>
-                            <a:schemeClr val="bg1"/>
-                          </a:solidFill>
-                          <a:latin typeface="Cambria Math" panose="02040503050406030204" pitchFamily="18" charset="0"/>
-                        </a:rPr>
-                        <m:t>𝟒</m:t>
-                      </m:r>
-                      <m:r>
-                        <a:rPr lang="en-PH" sz="5000" b="1" i="1" dirty="0" smtClean="0">
-                          <a:solidFill>
-                            <a:schemeClr val="bg1"/>
-                          </a:solidFill>
-                          <a:latin typeface="Cambria Math" panose="02040503050406030204" pitchFamily="18" charset="0"/>
-                        </a:rPr>
-                        <m:t>!=</m:t>
-                      </m:r>
-                      <m:r>
-                        <a:rPr lang="en-PH" sz="5000" b="1" i="1" dirty="0" smtClean="0">
-                          <a:solidFill>
-                            <a:schemeClr val="bg1"/>
-                          </a:solidFill>
-                          <a:latin typeface="Cambria Math" panose="02040503050406030204" pitchFamily="18" charset="0"/>
-                          <a:ea typeface="Cambria Math" panose="02040503050406030204" pitchFamily="18" charset="0"/>
-                        </a:rPr>
-                        <m:t>𝟒</m:t>
-                      </m:r>
-                      <m:r>
-                        <a:rPr lang="en-PH" sz="5000" b="1" i="1" dirty="0" smtClean="0">
-                          <a:solidFill>
-                            <a:schemeClr val="bg1"/>
-                          </a:solidFill>
-                          <a:latin typeface="Cambria Math" panose="02040503050406030204" pitchFamily="18" charset="0"/>
-                          <a:ea typeface="Cambria Math" panose="02040503050406030204" pitchFamily="18" charset="0"/>
-                        </a:rPr>
-                        <m:t>×</m:t>
-                      </m:r>
-                      <m:r>
-                        <a:rPr lang="en-PH" sz="5000" b="1" i="1" dirty="0" smtClean="0">
-                          <a:solidFill>
-                            <a:schemeClr val="bg1"/>
-                          </a:solidFill>
-                          <a:latin typeface="Cambria Math" panose="02040503050406030204" pitchFamily="18" charset="0"/>
-                          <a:ea typeface="Cambria Math" panose="02040503050406030204" pitchFamily="18" charset="0"/>
-                        </a:rPr>
-                        <m:t>𝟑</m:t>
-                      </m:r>
-                      <m:r>
-                        <a:rPr lang="en-PH" sz="5000" b="1" i="1" dirty="0">
-                          <a:solidFill>
-                            <a:schemeClr val="bg1"/>
-                          </a:solidFill>
-                          <a:latin typeface="Cambria Math" panose="02040503050406030204" pitchFamily="18" charset="0"/>
-                          <a:ea typeface="Cambria Math" panose="02040503050406030204" pitchFamily="18" charset="0"/>
-                        </a:rPr>
-                        <m:t>×</m:t>
-                      </m:r>
-                      <m:r>
-                        <a:rPr lang="en-PH" sz="5000" b="1" i="1" dirty="0" smtClean="0">
-                          <a:solidFill>
-                            <a:schemeClr val="bg1"/>
-                          </a:solidFill>
-                          <a:latin typeface="Cambria Math" panose="02040503050406030204" pitchFamily="18" charset="0"/>
-                          <a:ea typeface="Cambria Math" panose="02040503050406030204" pitchFamily="18" charset="0"/>
-                        </a:rPr>
-                        <m:t>𝟐</m:t>
-                      </m:r>
-                      <m:r>
-                        <a:rPr lang="en-PH" sz="5000" b="1" i="1" dirty="0">
-                          <a:solidFill>
-                            <a:schemeClr val="bg1"/>
-                          </a:solidFill>
-                          <a:latin typeface="Cambria Math" panose="02040503050406030204" pitchFamily="18" charset="0"/>
-                          <a:ea typeface="Cambria Math" panose="02040503050406030204" pitchFamily="18" charset="0"/>
-                        </a:rPr>
-                        <m:t>×</m:t>
-                      </m:r>
-                      <m:r>
-                        <a:rPr lang="en-PH" sz="5000" b="1" i="1" dirty="0" smtClean="0">
-                          <a:solidFill>
-                            <a:schemeClr val="bg1"/>
-                          </a:solidFill>
-                          <a:latin typeface="Cambria Math" panose="02040503050406030204" pitchFamily="18" charset="0"/>
-                          <a:ea typeface="Cambria Math" panose="02040503050406030204" pitchFamily="18" charset="0"/>
-                        </a:rPr>
-                        <m:t>𝟏</m:t>
-                      </m:r>
-                    </m:oMath>
-                  </m:oMathPara>
-                </a14:m>
-              </a:p>
-            </p:txBody>
-          </p:sp>
-        </mc:Choice>
-        <mc:Fallback>
-          <p:sp>
-            <p:nvSpPr>
-              <p:cNvPr id="14" name="TextBox 13">
-                <a:extLst>
-                  <a:ext uri="{FF2B5EF4-FFF2-40B4-BE49-F238E27FC236}">
-                    <a16:creationId xmlns:a16="http://schemas.microsoft.com/office/drawing/2014/main" id="{C1193C3E-2D72-75B0-3A6D-8FCF8D69D33C}"/>
-                  </a:ext>
-                </a:extLst>
-              </p:cNvPr>
-              <p:cNvSpPr txBox="1">
-                <a:spLocks noRot="1" noChangeAspect="1" noMove="1" noResize="1" noEditPoints="1" noAdjustHandles="1" noChangeArrowheads="1" noChangeShapeType="1" noTextEdit="1"/>
-              </p:cNvSpPr>
-              <p:nvPr/>
-            </p:nvSpPr>
-            <p:spPr>
-              <a:xfrm>
-                <a:off x="2743200" y="4112579"/>
-                <a:ext cx="6705600" cy="861774"/>
-              </a:xfrm>
-              <a:prstGeom prst="rect">
-                <a:avLst/>
-              </a:prstGeom>
-              <a:blipFill>
-                <a:blip r:embed="rId7"/>
-                <a:stretch>
-                  <a:fillRect/>
-                </a:stretch>
-              </a:blipFill>
-            </p:spPr>
-            <p:txBody>
-              <a:bodyPr/>
-              <a:lstStyle/>
-              <a:p>
-                <a:r>
-                  <a:rPr lang="en-PH">
-                    <a:noFill/>
-                  </a:rPr>
-                  <a:t> </a:t>
-                </a:r>
-              </a:p>
-            </p:txBody>
-          </p:sp>
-        </mc:Fallback>
-      </mc:AlternateContent>
+      <p:sp>
+        <p:nvSpPr>
+          <p:cNvPr id="4" name="TextBox 3">
+            <a:extLst>
+              <a:ext uri="{FF2B5EF4-FFF2-40B4-BE49-F238E27FC236}">
+                <a16:creationId xmlns:a16="http://schemas.microsoft.com/office/drawing/2014/main" id="{B1BC5B81-CB08-5FA4-9156-A81171134E11}"/>
+              </a:ext>
+            </a:extLst>
+          </p:cNvPr>
+          <p:cNvSpPr txBox="1"/>
+          <p:nvPr/>
+        </p:nvSpPr>
+        <p:spPr>
+          <a:xfrm>
+            <a:off x="609600" y="5469819"/>
+            <a:ext cx="10972800" cy="861774"/>
+          </a:xfrm>
+          <a:prstGeom prst="rect">
+            <a:avLst/>
+          </a:prstGeom>
+          <a:noFill/>
+        </p:spPr>
+        <p:txBody>
+          <a:bodyPr wrap="square">
+            <a:spAutoFit/>
+          </a:bodyPr>
+          <a:lstStyle/>
+          <a:p>
+            <a:pPr algn="ctr"/>
+            <a:r>
+              <a:rPr lang="en-PH" sz="2500" b="1" dirty="0">
+                <a:solidFill>
+                  <a:schemeClr val="bg1"/>
+                </a:solidFill>
+              </a:rPr>
+              <a:t>Recursion </a:t>
+            </a:r>
+            <a:r>
+              <a:rPr lang="en-PH" sz="2500" dirty="0">
+                <a:solidFill>
+                  <a:schemeClr val="bg1"/>
+                </a:solidFill>
+              </a:rPr>
+              <a:t>is useful when a problem has a self-similar structure, meaning the solution can be defined in terms of smaller instances of itself.</a:t>
+            </a:r>
+          </a:p>
+        </p:txBody>
+      </p:sp>
+      <p:pic>
+        <p:nvPicPr>
+          <p:cNvPr id="7" name="Picture 6">
+            <a:extLst>
+              <a:ext uri="{FF2B5EF4-FFF2-40B4-BE49-F238E27FC236}">
+                <a16:creationId xmlns:a16="http://schemas.microsoft.com/office/drawing/2014/main" id="{CA86F53B-A047-8F1B-FC4C-DDD6EC3137CD}"/>
+              </a:ext>
+            </a:extLst>
+          </p:cNvPr>
+          <p:cNvPicPr>
+            <a:picLocks noChangeAspect="1"/>
+          </p:cNvPicPr>
+          <p:nvPr/>
+        </p:nvPicPr>
+        <p:blipFill>
+          <a:blip r:embed="rId3">
+            <a:extLst>
+              <a:ext uri="{28A0092B-C50C-407E-A947-70E740481C1C}">
+                <a14:useLocalDpi xmlns:a14="http://schemas.microsoft.com/office/drawing/2010/main" val="0"/>
+              </a:ext>
+            </a:extLst>
+          </a:blip>
+          <a:stretch>
+            <a:fillRect/>
+          </a:stretch>
+        </p:blipFill>
+        <p:spPr>
+          <a:xfrm>
+            <a:off x="1708968" y="1766713"/>
+            <a:ext cx="2880000" cy="1440000"/>
+          </a:xfrm>
+          <a:prstGeom prst="rect">
+            <a:avLst/>
+          </a:prstGeom>
+        </p:spPr>
+      </p:pic>
+      <p:pic>
+        <p:nvPicPr>
+          <p:cNvPr id="15" name="Picture 14">
+            <a:extLst>
+              <a:ext uri="{FF2B5EF4-FFF2-40B4-BE49-F238E27FC236}">
+                <a16:creationId xmlns:a16="http://schemas.microsoft.com/office/drawing/2014/main" id="{CBA62EE5-3A88-792C-2EA2-97DD7D5FC38D}"/>
+              </a:ext>
+            </a:extLst>
+          </p:cNvPr>
+          <p:cNvPicPr>
+            <a:picLocks noChangeAspect="1"/>
+          </p:cNvPicPr>
+          <p:nvPr/>
+        </p:nvPicPr>
+        <p:blipFill>
+          <a:blip r:embed="rId4">
+            <a:extLst>
+              <a:ext uri="{28A0092B-C50C-407E-A947-70E740481C1C}">
+                <a14:useLocalDpi xmlns:a14="http://schemas.microsoft.com/office/drawing/2010/main" val="0"/>
+              </a:ext>
+            </a:extLst>
+          </a:blip>
+          <a:stretch>
+            <a:fillRect/>
+          </a:stretch>
+        </p:blipFill>
+        <p:spPr>
+          <a:xfrm>
+            <a:off x="7867230" y="1766713"/>
+            <a:ext cx="2880000" cy="1440000"/>
+          </a:xfrm>
+          <a:prstGeom prst="rect">
+            <a:avLst/>
+          </a:prstGeom>
+        </p:spPr>
+      </p:pic>
+      <p:pic>
+        <p:nvPicPr>
+          <p:cNvPr id="17" name="Picture 16">
+            <a:extLst>
+              <a:ext uri="{FF2B5EF4-FFF2-40B4-BE49-F238E27FC236}">
+                <a16:creationId xmlns:a16="http://schemas.microsoft.com/office/drawing/2014/main" id="{F9B01209-B36F-019C-DE9A-9B09BAF5B01C}"/>
+              </a:ext>
+            </a:extLst>
+          </p:cNvPr>
+          <p:cNvPicPr>
+            <a:picLocks noChangeAspect="1"/>
+          </p:cNvPicPr>
+          <p:nvPr/>
+        </p:nvPicPr>
+        <p:blipFill>
+          <a:blip r:embed="rId5">
+            <a:extLst>
+              <a:ext uri="{28A0092B-C50C-407E-A947-70E740481C1C}">
+                <a14:useLocalDpi xmlns:a14="http://schemas.microsoft.com/office/drawing/2010/main" val="0"/>
+              </a:ext>
+            </a:extLst>
+          </a:blip>
+          <a:stretch>
+            <a:fillRect/>
+          </a:stretch>
+        </p:blipFill>
+        <p:spPr>
+          <a:xfrm>
+            <a:off x="4588968" y="3585243"/>
+            <a:ext cx="3278262" cy="1800000"/>
+          </a:xfrm>
+          <a:prstGeom prst="rect">
+            <a:avLst/>
+          </a:prstGeom>
+        </p:spPr>
+      </p:pic>
     </p:spTree>
     <p:extLst>
       <p:ext uri="{BB962C8B-B14F-4D97-AF65-F5344CB8AC3E}">
@@ -21660,320 +22332,18 @@
   <p:clrMapOvr>
     <a:masterClrMapping/>
   </p:clrMapOvr>
-  <mc:AlternateContent xmlns:mc="http://schemas.openxmlformats.org/markup-compatibility/2006">
-    <mc:Choice xmlns:p159="http://schemas.microsoft.com/office/powerpoint/2015/09/main" Requires="p159">
+  <mc:AlternateContent xmlns:mc="http://schemas.openxmlformats.org/markup-compatibility/2006" xmlns:p159="http://schemas.microsoft.com/office/powerpoint/2015/09/main">
+    <mc:Choice Requires="p159">
       <p:transition xmlns:p14="http://schemas.microsoft.com/office/powerpoint/2010/main" spd="slow" p14:dur="2000">
         <p159:morph option="byObject"/>
       </p:transition>
     </mc:Choice>
-    <mc:Fallback>
+    <mc:Fallback xmlns="">
       <p:transition spd="slow">
         <p:fade/>
       </p:transition>
     </mc:Fallback>
   </mc:AlternateContent>
-  <p:timing>
-    <p:tnLst>
-      <p:par>
-        <p:cTn id="1" dur="indefinite" restart="never" nodeType="tmRoot">
-          <p:childTnLst>
-            <p:seq concurrent="1" nextAc="seek">
-              <p:cTn id="2" dur="indefinite" nodeType="mainSeq">
-                <p:childTnLst>
-                  <p:par>
-                    <p:cTn id="3" fill="hold">
-                      <p:stCondLst>
-                        <p:cond delay="indefinite"/>
-                      </p:stCondLst>
-                      <p:childTnLst>
-                        <p:par>
-                          <p:cTn id="4" fill="hold">
-                            <p:stCondLst>
-                              <p:cond delay="0"/>
-                            </p:stCondLst>
-                            <p:childTnLst>
-                              <p:par>
-                                <p:cTn id="5" presetID="10" presetClass="entr" presetSubtype="0" fill="hold" grpId="0" nodeType="clickEffect">
-                                  <p:stCondLst>
-                                    <p:cond delay="0"/>
-                                  </p:stCondLst>
-                                  <p:childTnLst>
-                                    <p:set>
-                                      <p:cBhvr>
-                                        <p:cTn id="6" dur="1" fill="hold">
-                                          <p:stCondLst>
-                                            <p:cond delay="0"/>
-                                          </p:stCondLst>
-                                        </p:cTn>
-                                        <p:tgtEl>
-                                          <p:spTgt spid="13"/>
-                                        </p:tgtEl>
-                                        <p:attrNameLst>
-                                          <p:attrName>style.visibility</p:attrName>
-                                        </p:attrNameLst>
-                                      </p:cBhvr>
-                                      <p:to>
-                                        <p:strVal val="visible"/>
-                                      </p:to>
-                                    </p:set>
-                                    <p:animEffect transition="in" filter="fade">
-                                      <p:cBhvr>
-                                        <p:cTn id="7" dur="500"/>
-                                        <p:tgtEl>
-                                          <p:spTgt spid="13"/>
-                                        </p:tgtEl>
-                                      </p:cBhvr>
-                                    </p:animEffect>
-                                  </p:childTnLst>
-                                </p:cTn>
-                              </p:par>
-                            </p:childTnLst>
-                          </p:cTn>
-                        </p:par>
-                      </p:childTnLst>
-                    </p:cTn>
-                  </p:par>
-                  <p:par>
-                    <p:cTn id="8" fill="hold">
-                      <p:stCondLst>
-                        <p:cond delay="indefinite"/>
-                      </p:stCondLst>
-                      <p:childTnLst>
-                        <p:par>
-                          <p:cTn id="9" fill="hold">
-                            <p:stCondLst>
-                              <p:cond delay="0"/>
-                            </p:stCondLst>
-                            <p:childTnLst>
-                              <p:par>
-                                <p:cTn id="10" presetID="10" presetClass="entr" presetSubtype="0" fill="hold" grpId="0" nodeType="clickEffect">
-                                  <p:stCondLst>
-                                    <p:cond delay="0"/>
-                                  </p:stCondLst>
-                                  <p:childTnLst>
-                                    <p:set>
-                                      <p:cBhvr>
-                                        <p:cTn id="11" dur="1" fill="hold">
-                                          <p:stCondLst>
-                                            <p:cond delay="0"/>
-                                          </p:stCondLst>
-                                        </p:cTn>
-                                        <p:tgtEl>
-                                          <p:spTgt spid="12"/>
-                                        </p:tgtEl>
-                                        <p:attrNameLst>
-                                          <p:attrName>style.visibility</p:attrName>
-                                        </p:attrNameLst>
-                                      </p:cBhvr>
-                                      <p:to>
-                                        <p:strVal val="visible"/>
-                                      </p:to>
-                                    </p:set>
-                                    <p:animEffect transition="in" filter="fade">
-                                      <p:cBhvr>
-                                        <p:cTn id="12" dur="500"/>
-                                        <p:tgtEl>
-                                          <p:spTgt spid="12"/>
-                                        </p:tgtEl>
-                                      </p:cBhvr>
-                                    </p:animEffect>
-                                  </p:childTnLst>
-                                </p:cTn>
-                              </p:par>
-                            </p:childTnLst>
-                          </p:cTn>
-                        </p:par>
-                      </p:childTnLst>
-                    </p:cTn>
-                  </p:par>
-                  <p:par>
-                    <p:cTn id="13" fill="hold">
-                      <p:stCondLst>
-                        <p:cond delay="indefinite"/>
-                      </p:stCondLst>
-                      <p:childTnLst>
-                        <p:par>
-                          <p:cTn id="14" fill="hold">
-                            <p:stCondLst>
-                              <p:cond delay="0"/>
-                            </p:stCondLst>
-                            <p:childTnLst>
-                              <p:par>
-                                <p:cTn id="15" presetID="10" presetClass="entr" presetSubtype="0" fill="hold" grpId="0" nodeType="clickEffect">
-                                  <p:stCondLst>
-                                    <p:cond delay="0"/>
-                                  </p:stCondLst>
-                                  <p:childTnLst>
-                                    <p:set>
-                                      <p:cBhvr>
-                                        <p:cTn id="16" dur="1" fill="hold">
-                                          <p:stCondLst>
-                                            <p:cond delay="0"/>
-                                          </p:stCondLst>
-                                        </p:cTn>
-                                        <p:tgtEl>
-                                          <p:spTgt spid="11"/>
-                                        </p:tgtEl>
-                                        <p:attrNameLst>
-                                          <p:attrName>style.visibility</p:attrName>
-                                        </p:attrNameLst>
-                                      </p:cBhvr>
-                                      <p:to>
-                                        <p:strVal val="visible"/>
-                                      </p:to>
-                                    </p:set>
-                                    <p:animEffect transition="in" filter="fade">
-                                      <p:cBhvr>
-                                        <p:cTn id="17" dur="500"/>
-                                        <p:tgtEl>
-                                          <p:spTgt spid="11"/>
-                                        </p:tgtEl>
-                                      </p:cBhvr>
-                                    </p:animEffect>
-                                  </p:childTnLst>
-                                </p:cTn>
-                              </p:par>
-                            </p:childTnLst>
-                          </p:cTn>
-                        </p:par>
-                      </p:childTnLst>
-                    </p:cTn>
-                  </p:par>
-                  <p:par>
-                    <p:cTn id="18" fill="hold">
-                      <p:stCondLst>
-                        <p:cond delay="indefinite"/>
-                      </p:stCondLst>
-                      <p:childTnLst>
-                        <p:par>
-                          <p:cTn id="19" fill="hold">
-                            <p:stCondLst>
-                              <p:cond delay="0"/>
-                            </p:stCondLst>
-                            <p:childTnLst>
-                              <p:par>
-                                <p:cTn id="20" presetID="10" presetClass="entr" presetSubtype="0" fill="hold" grpId="0" nodeType="clickEffect">
-                                  <p:stCondLst>
-                                    <p:cond delay="0"/>
-                                  </p:stCondLst>
-                                  <p:childTnLst>
-                                    <p:set>
-                                      <p:cBhvr>
-                                        <p:cTn id="21" dur="1" fill="hold">
-                                          <p:stCondLst>
-                                            <p:cond delay="0"/>
-                                          </p:stCondLst>
-                                        </p:cTn>
-                                        <p:tgtEl>
-                                          <p:spTgt spid="14"/>
-                                        </p:tgtEl>
-                                        <p:attrNameLst>
-                                          <p:attrName>style.visibility</p:attrName>
-                                        </p:attrNameLst>
-                                      </p:cBhvr>
-                                      <p:to>
-                                        <p:strVal val="visible"/>
-                                      </p:to>
-                                    </p:set>
-                                    <p:animEffect transition="in" filter="fade">
-                                      <p:cBhvr>
-                                        <p:cTn id="22" dur="500"/>
-                                        <p:tgtEl>
-                                          <p:spTgt spid="14"/>
-                                        </p:tgtEl>
-                                      </p:cBhvr>
-                                    </p:animEffect>
-                                  </p:childTnLst>
-                                </p:cTn>
-                              </p:par>
-                            </p:childTnLst>
-                          </p:cTn>
-                        </p:par>
-                      </p:childTnLst>
-                    </p:cTn>
-                  </p:par>
-                  <p:par>
-                    <p:cTn id="23" fill="hold">
-                      <p:stCondLst>
-                        <p:cond delay="indefinite"/>
-                      </p:stCondLst>
-                      <p:childTnLst>
-                        <p:par>
-                          <p:cTn id="24" fill="hold">
-                            <p:stCondLst>
-                              <p:cond delay="0"/>
-                            </p:stCondLst>
-                            <p:childTnLst>
-                              <p:par>
-                                <p:cTn id="25" presetID="10" presetClass="entr" presetSubtype="0" fill="hold" grpId="0" nodeType="clickEffect">
-                                  <p:stCondLst>
-                                    <p:cond delay="0"/>
-                                  </p:stCondLst>
-                                  <p:childTnLst>
-                                    <p:set>
-                                      <p:cBhvr>
-                                        <p:cTn id="26" dur="1" fill="hold">
-                                          <p:stCondLst>
-                                            <p:cond delay="0"/>
-                                          </p:stCondLst>
-                                        </p:cTn>
-                                        <p:tgtEl>
-                                          <p:spTgt spid="10"/>
-                                        </p:tgtEl>
-                                        <p:attrNameLst>
-                                          <p:attrName>style.visibility</p:attrName>
-                                        </p:attrNameLst>
-                                      </p:cBhvr>
-                                      <p:to>
-                                        <p:strVal val="visible"/>
-                                      </p:to>
-                                    </p:set>
-                                    <p:animEffect transition="in" filter="fade">
-                                      <p:cBhvr>
-                                        <p:cTn id="27" dur="500"/>
-                                        <p:tgtEl>
-                                          <p:spTgt spid="10"/>
-                                        </p:tgtEl>
-                                      </p:cBhvr>
-                                    </p:animEffect>
-                                  </p:childTnLst>
-                                </p:cTn>
-                              </p:par>
-                            </p:childTnLst>
-                          </p:cTn>
-                        </p:par>
-                      </p:childTnLst>
-                    </p:cTn>
-                  </p:par>
-                </p:childTnLst>
-              </p:cTn>
-              <p:prevCondLst>
-                <p:cond evt="onPrev" delay="0">
-                  <p:tgtEl>
-                    <p:sldTgt/>
-                  </p:tgtEl>
-                </p:cond>
-              </p:prevCondLst>
-              <p:nextCondLst>
-                <p:cond evt="onNext" delay="0">
-                  <p:tgtEl>
-                    <p:sldTgt/>
-                  </p:tgtEl>
-                </p:cond>
-              </p:nextCondLst>
-            </p:seq>
-          </p:childTnLst>
-        </p:cTn>
-      </p:par>
-    </p:tnLst>
-    <p:bldLst>
-      <p:bldP spid="10" grpId="0"/>
-      <p:bldP spid="11" grpId="0"/>
-      <p:bldP spid="12" grpId="0"/>
-      <p:bldP spid="13" grpId="0"/>
-      <p:bldP spid="14" grpId="0"/>
-    </p:bldLst>
-  </p:timing>
 </p:sld>
 </file>
 
@@ -22568,6 +22938,21 @@
 </file>
 
 <file path=customXml/item1.xml><?xml version="1.0" encoding="utf-8"?>
+<p:properties xmlns:p="http://schemas.microsoft.com/office/2006/metadata/properties" xmlns:xsi="http://www.w3.org/2001/XMLSchema-instance" xmlns:pc="http://schemas.microsoft.com/office/infopath/2007/PartnerControls">
+  <documentManagement/>
+</p:properties>
+</file>
+
+<file path=customXml/item2.xml><?xml version="1.0" encoding="utf-8"?>
+<?mso-contentType ?>
+<FormTemplates xmlns="http://schemas.microsoft.com/sharepoint/v3/contenttype/forms">
+  <Display>DocumentLibraryForm</Display>
+  <Edit>DocumentLibraryForm</Edit>
+  <New>DocumentLibraryForm</New>
+</FormTemplates>
+</file>
+
+<file path=customXml/item3.xml><?xml version="1.0" encoding="utf-8"?>
 <ct:contentTypeSchema xmlns:ct="http://schemas.microsoft.com/office/2006/metadata/contentType" xmlns:ma="http://schemas.microsoft.com/office/2006/metadata/properties/metaAttributes" ct:_="" ma:_="" ma:contentTypeName="Document" ma:contentTypeID="0x0101007188BDCA587B344BBA6CB1A93FAE6998" ma:contentTypeVersion="2" ma:contentTypeDescription="Create a new document." ma:contentTypeScope="" ma:versionID="7a8e4b6720badb2566a0cfeddfaf2856">
   <xsd:schema xmlns:xsd="http://www.w3.org/2001/XMLSchema" xmlns:xs="http://www.w3.org/2001/XMLSchema" xmlns:p="http://schemas.microsoft.com/office/2006/metadata/properties" xmlns:ns2="ba111d12-426d-4af0-bcb6-460e36974645" targetNamespace="http://schemas.microsoft.com/office/2006/metadata/properties" ma:root="true" ma:fieldsID="989b05398519136c88ba0a8d54e3c3da" ns2:_="">
     <xsd:import namespace="ba111d12-426d-4af0-bcb6-460e36974645"/>
@@ -22699,22 +23084,24 @@
 </ct:contentTypeSchema>
 </file>
 
-<file path=customXml/item2.xml><?xml version="1.0" encoding="utf-8"?>
-<?mso-contentType ?>
-<FormTemplates xmlns="http://schemas.microsoft.com/sharepoint/v3/contenttype/forms">
-  <Display>DocumentLibraryForm</Display>
-  <Edit>DocumentLibraryForm</Edit>
-  <New>DocumentLibraryForm</New>
-</FormTemplates>
+<file path=customXml/itemProps1.xml><?xml version="1.0" encoding="utf-8"?>
+<ds:datastoreItem xmlns:ds="http://schemas.openxmlformats.org/officeDocument/2006/customXml" ds:itemID="{857C6131-C561-4201-AE06-D21CDE528BF4}">
+  <ds:schemaRefs>
+    <ds:schemaRef ds:uri="http://schemas.microsoft.com/office/2006/metadata/properties"/>
+    <ds:schemaRef ds:uri="http://schemas.microsoft.com/office/infopath/2007/PartnerControls"/>
+  </ds:schemaRefs>
+</ds:datastoreItem>
 </file>
 
-<file path=customXml/item3.xml><?xml version="1.0" encoding="utf-8"?>
-<p:properties xmlns:p="http://schemas.microsoft.com/office/2006/metadata/properties" xmlns:xsi="http://www.w3.org/2001/XMLSchema-instance" xmlns:pc="http://schemas.microsoft.com/office/infopath/2007/PartnerControls">
-  <documentManagement/>
-</p:properties>
+<file path=customXml/itemProps2.xml><?xml version="1.0" encoding="utf-8"?>
+<ds:datastoreItem xmlns:ds="http://schemas.openxmlformats.org/officeDocument/2006/customXml" ds:itemID="{C598EE6F-E26B-42BB-A8C4-ECA40997D302}">
+  <ds:schemaRefs>
+    <ds:schemaRef ds:uri="http://schemas.microsoft.com/sharepoint/v3/contenttype/forms"/>
+  </ds:schemaRefs>
+</ds:datastoreItem>
 </file>
 
-<file path=customXml/itemProps1.xml><?xml version="1.0" encoding="utf-8"?>
+<file path=customXml/itemProps3.xml><?xml version="1.0" encoding="utf-8"?>
 <ds:datastoreItem xmlns:ds="http://schemas.openxmlformats.org/officeDocument/2006/customXml" ds:itemID="{96C2DE78-7F75-46EF-BA1C-8DDDE33EBFA6}">
   <ds:schemaRefs>
     <ds:schemaRef ds:uri="http://schemas.microsoft.com/office/2006/metadata/contentType"/>
@@ -22730,21 +23117,4 @@
     <ds:schemaRef ds:uri="http://schemas.microsoft.com/internal/obd"/>
   </ds:schemaRefs>
 </ds:datastoreItem>
-</file>
-
-<file path=customXml/itemProps2.xml><?xml version="1.0" encoding="utf-8"?>
-<ds:datastoreItem xmlns:ds="http://schemas.openxmlformats.org/officeDocument/2006/customXml" ds:itemID="{C598EE6F-E26B-42BB-A8C4-ECA40997D302}">
-  <ds:schemaRefs>
-    <ds:schemaRef ds:uri="http://schemas.microsoft.com/sharepoint/v3/contenttype/forms"/>
-  </ds:schemaRefs>
-</ds:datastoreItem>
-</file>
-
-<file path=customXml/itemProps3.xml><?xml version="1.0" encoding="utf-8"?>
-<ds:datastoreItem xmlns:ds="http://schemas.openxmlformats.org/officeDocument/2006/customXml" ds:itemID="{857C6131-C561-4201-AE06-D21CDE528BF4}">
-  <ds:schemaRefs>
-    <ds:schemaRef ds:uri="http://schemas.microsoft.com/office/2006/metadata/properties"/>
-    <ds:schemaRef ds:uri="http://schemas.microsoft.com/office/infopath/2007/PartnerControls"/>
-  </ds:schemaRefs>
-</ds:datastoreItem>
 </file>
--- a/recursion/Recursion.pptx
+++ b/recursion/Recursion.pptx
@@ -217,7 +217,7 @@
           <a:p>
             <a:fld id="{F666E1FD-E7A0-497B-BBC0-740BAAC97C64}" type="datetimeFigureOut">
               <a:rPr lang="en-PH" smtClean="0"/>
-              <a:t>15/06/2026</a:t>
+              <a:t>6/15/26</a:t>
             </a:fld>
             <a:endParaRPr lang="en-PH"/>
           </a:p>
@@ -2014,7 +2014,7 @@
           <a:p>
             <a:fld id="{0CCF0B81-6BD8-4C65-9459-815598C5F1F4}" type="datetimeFigureOut">
               <a:rPr lang="en-PH" smtClean="0"/>
-              <a:t>15/06/2026</a:t>
+              <a:t>6/15/26</a:t>
             </a:fld>
             <a:endParaRPr lang="en-PH"/>
           </a:p>
@@ -2214,7 +2214,7 @@
           <a:p>
             <a:fld id="{0CCF0B81-6BD8-4C65-9459-815598C5F1F4}" type="datetimeFigureOut">
               <a:rPr lang="en-PH" smtClean="0"/>
-              <a:t>15/06/2026</a:t>
+              <a:t>6/15/26</a:t>
             </a:fld>
             <a:endParaRPr lang="en-PH"/>
           </a:p>
@@ -2424,7 +2424,7 @@
           <a:p>
             <a:fld id="{0CCF0B81-6BD8-4C65-9459-815598C5F1F4}" type="datetimeFigureOut">
               <a:rPr lang="en-PH" smtClean="0"/>
-              <a:t>15/06/2026</a:t>
+              <a:t>6/15/26</a:t>
             </a:fld>
             <a:endParaRPr lang="en-PH"/>
           </a:p>
@@ -2624,7 +2624,7 @@
           <a:p>
             <a:fld id="{0CCF0B81-6BD8-4C65-9459-815598C5F1F4}" type="datetimeFigureOut">
               <a:rPr lang="en-PH" smtClean="0"/>
-              <a:t>15/06/2026</a:t>
+              <a:t>6/15/26</a:t>
             </a:fld>
             <a:endParaRPr lang="en-PH"/>
           </a:p>
@@ -2900,7 +2900,7 @@
           <a:p>
             <a:fld id="{0CCF0B81-6BD8-4C65-9459-815598C5F1F4}" type="datetimeFigureOut">
               <a:rPr lang="en-PH" smtClean="0"/>
-              <a:t>15/06/2026</a:t>
+              <a:t>6/15/26</a:t>
             </a:fld>
             <a:endParaRPr lang="en-PH"/>
           </a:p>
@@ -3168,7 +3168,7 @@
           <a:p>
             <a:fld id="{0CCF0B81-6BD8-4C65-9459-815598C5F1F4}" type="datetimeFigureOut">
               <a:rPr lang="en-PH" smtClean="0"/>
-              <a:t>15/06/2026</a:t>
+              <a:t>6/15/26</a:t>
             </a:fld>
             <a:endParaRPr lang="en-PH"/>
           </a:p>
@@ -3583,7 +3583,7 @@
           <a:p>
             <a:fld id="{0CCF0B81-6BD8-4C65-9459-815598C5F1F4}" type="datetimeFigureOut">
               <a:rPr lang="en-PH" smtClean="0"/>
-              <a:t>15/06/2026</a:t>
+              <a:t>6/15/26</a:t>
             </a:fld>
             <a:endParaRPr lang="en-PH"/>
           </a:p>
@@ -3725,7 +3725,7 @@
           <a:p>
             <a:fld id="{0CCF0B81-6BD8-4C65-9459-815598C5F1F4}" type="datetimeFigureOut">
               <a:rPr lang="en-PH" smtClean="0"/>
-              <a:t>15/06/2026</a:t>
+              <a:t>6/15/26</a:t>
             </a:fld>
             <a:endParaRPr lang="en-PH"/>
           </a:p>
@@ -3838,7 +3838,7 @@
           <a:p>
             <a:fld id="{0CCF0B81-6BD8-4C65-9459-815598C5F1F4}" type="datetimeFigureOut">
               <a:rPr lang="en-PH" smtClean="0"/>
-              <a:t>15/06/2026</a:t>
+              <a:t>6/15/26</a:t>
             </a:fld>
             <a:endParaRPr lang="en-PH"/>
           </a:p>
@@ -4151,7 +4151,7 @@
           <a:p>
             <a:fld id="{0CCF0B81-6BD8-4C65-9459-815598C5F1F4}" type="datetimeFigureOut">
               <a:rPr lang="en-PH" smtClean="0"/>
-              <a:t>15/06/2026</a:t>
+              <a:t>6/15/26</a:t>
             </a:fld>
             <a:endParaRPr lang="en-PH"/>
           </a:p>
@@ -4440,7 +4440,7 @@
           <a:p>
             <a:fld id="{0CCF0B81-6BD8-4C65-9459-815598C5F1F4}" type="datetimeFigureOut">
               <a:rPr lang="en-PH" smtClean="0"/>
-              <a:t>15/06/2026</a:t>
+              <a:t>6/15/26</a:t>
             </a:fld>
             <a:endParaRPr lang="en-PH"/>
           </a:p>
@@ -4683,7 +4683,7 @@
           <a:p>
             <a:fld id="{0CCF0B81-6BD8-4C65-9459-815598C5F1F4}" type="datetimeFigureOut">
               <a:rPr lang="en-PH" smtClean="0"/>
-              <a:t>15/06/2026</a:t>
+              <a:t>6/15/26</a:t>
             </a:fld>
             <a:endParaRPr lang="en-PH"/>
           </a:p>
@@ -5330,8 +5330,8 @@
           </a:p>
         </p:txBody>
       </p:sp>
-      <mc:AlternateContent xmlns:mc="http://schemas.openxmlformats.org/markup-compatibility/2006">
-        <mc:Choice xmlns:a14="http://schemas.microsoft.com/office/drawing/2010/main" Requires="a14">
+      <mc:AlternateContent xmlns:mc="http://schemas.openxmlformats.org/markup-compatibility/2006" xmlns:a14="http://schemas.microsoft.com/office/drawing/2010/main">
+        <mc:Choice Requires="a14">
           <p:sp>
             <p:nvSpPr>
               <p:cNvPr id="10" name="TextBox 9">
@@ -5481,7 +5481,7 @@
             </p:txBody>
           </p:sp>
         </mc:Choice>
-        <mc:Fallback>
+        <mc:Fallback xmlns="">
           <p:sp>
             <p:nvSpPr>
               <p:cNvPr id="10" name="TextBox 9">
@@ -5526,8 +5526,8 @@
           </p:sp>
         </mc:Fallback>
       </mc:AlternateContent>
-      <mc:AlternateContent xmlns:mc="http://schemas.openxmlformats.org/markup-compatibility/2006">
-        <mc:Choice xmlns:a14="http://schemas.microsoft.com/office/drawing/2010/main" Requires="a14">
+      <mc:AlternateContent xmlns:mc="http://schemas.openxmlformats.org/markup-compatibility/2006" xmlns:a14="http://schemas.microsoft.com/office/drawing/2010/main">
+        <mc:Choice Requires="a14">
           <p:sp>
             <p:nvSpPr>
               <p:cNvPr id="11" name="TextBox 10">
@@ -5639,7 +5639,7 @@
             </p:txBody>
           </p:sp>
         </mc:Choice>
-        <mc:Fallback>
+        <mc:Fallback xmlns="">
           <p:sp>
             <p:nvSpPr>
               <p:cNvPr id="11" name="TextBox 10">
@@ -5684,8 +5684,8 @@
           </p:sp>
         </mc:Fallback>
       </mc:AlternateContent>
-      <mc:AlternateContent xmlns:mc="http://schemas.openxmlformats.org/markup-compatibility/2006">
-        <mc:Choice xmlns:a14="http://schemas.microsoft.com/office/drawing/2010/main" Requires="a14">
+      <mc:AlternateContent xmlns:mc="http://schemas.openxmlformats.org/markup-compatibility/2006" xmlns:a14="http://schemas.microsoft.com/office/drawing/2010/main">
+        <mc:Choice Requires="a14">
           <p:sp>
             <p:nvSpPr>
               <p:cNvPr id="12" name="TextBox 11">
@@ -5777,7 +5777,7 @@
             </p:txBody>
           </p:sp>
         </mc:Choice>
-        <mc:Fallback>
+        <mc:Fallback xmlns="">
           <p:sp>
             <p:nvSpPr>
               <p:cNvPr id="12" name="TextBox 11">
@@ -5822,8 +5822,8 @@
           </p:sp>
         </mc:Fallback>
       </mc:AlternateContent>
-      <mc:AlternateContent xmlns:mc="http://schemas.openxmlformats.org/markup-compatibility/2006">
-        <mc:Choice xmlns:a14="http://schemas.microsoft.com/office/drawing/2010/main" Requires="a14">
+      <mc:AlternateContent xmlns:mc="http://schemas.openxmlformats.org/markup-compatibility/2006" xmlns:a14="http://schemas.microsoft.com/office/drawing/2010/main">
+        <mc:Choice Requires="a14">
           <p:sp>
             <p:nvSpPr>
               <p:cNvPr id="13" name="TextBox 12">
@@ -5895,7 +5895,7 @@
             </p:txBody>
           </p:sp>
         </mc:Choice>
-        <mc:Fallback>
+        <mc:Fallback xmlns="">
           <p:sp>
             <p:nvSpPr>
               <p:cNvPr id="13" name="TextBox 12">
@@ -5940,8 +5940,8 @@
           </p:sp>
         </mc:Fallback>
       </mc:AlternateContent>
-      <mc:AlternateContent xmlns:mc="http://schemas.openxmlformats.org/markup-compatibility/2006">
-        <mc:Choice xmlns:a14="http://schemas.microsoft.com/office/drawing/2010/main" Requires="a14">
+      <mc:AlternateContent xmlns:mc="http://schemas.openxmlformats.org/markup-compatibility/2006" xmlns:a14="http://schemas.microsoft.com/office/drawing/2010/main">
+        <mc:Choice Requires="a14">
           <p:sp>
             <p:nvSpPr>
               <p:cNvPr id="14" name="TextBox 13">
@@ -6073,7 +6073,7 @@
             </p:txBody>
           </p:sp>
         </mc:Choice>
-        <mc:Fallback>
+        <mc:Fallback xmlns="">
           <p:sp>
             <p:nvSpPr>
               <p:cNvPr id="14" name="TextBox 13">
@@ -6128,13 +6128,13 @@
   <p:clrMapOvr>
     <a:masterClrMapping/>
   </p:clrMapOvr>
-  <mc:AlternateContent xmlns:mc="http://schemas.openxmlformats.org/markup-compatibility/2006">
-    <mc:Choice xmlns:p159="http://schemas.microsoft.com/office/powerpoint/2015/09/main" Requires="p159">
+  <mc:AlternateContent xmlns:mc="http://schemas.openxmlformats.org/markup-compatibility/2006" xmlns:p159="http://schemas.microsoft.com/office/powerpoint/2015/09/main">
+    <mc:Choice Requires="p159">
       <p:transition xmlns:p14="http://schemas.microsoft.com/office/powerpoint/2010/main" spd="slow" p14:dur="2000">
         <p159:morph option="byObject"/>
       </p:transition>
     </mc:Choice>
-    <mc:Fallback>
+    <mc:Fallback xmlns="">
       <p:transition spd="slow">
         <p:fade/>
       </p:transition>
@@ -10043,8 +10043,8 @@
           </a:fontRef>
         </p:style>
       </p:cxnSp>
-      <mc:AlternateContent xmlns:mc="http://schemas.openxmlformats.org/markup-compatibility/2006" xmlns:a14="http://schemas.microsoft.com/office/drawing/2010/main">
-        <mc:Choice Requires="a14">
+      <mc:AlternateContent xmlns:mc="http://schemas.openxmlformats.org/markup-compatibility/2006">
+        <mc:Choice xmlns:a14="http://schemas.microsoft.com/office/drawing/2010/main" Requires="a14">
           <p:sp>
             <p:nvSpPr>
               <p:cNvPr id="67" name="TextBox 66">
@@ -10060,7 +10060,7 @@
             <p:spPr>
               <a:xfrm>
                 <a:off x="4862460" y="1846056"/>
-                <a:ext cx="1596448" cy="400110"/>
+                <a:ext cx="1772608" cy="400110"/>
               </a:xfrm>
               <a:prstGeom prst="rect">
                 <a:avLst/>
@@ -10104,6 +10104,15 @@
                         <m:t> ∗</m:t>
                       </m:r>
                       <m:r>
+                        <a:rPr lang="en-GB" sz="2000" b="1" i="1" dirty="0" smtClean="0">
+                          <a:solidFill>
+                            <a:schemeClr val="tx1"/>
+                          </a:solidFill>
+                          <a:latin typeface="Cambria Math" panose="02040503050406030204" pitchFamily="18" charset="0"/>
+                        </a:rPr>
+                        <m:t>𝟐</m:t>
+                      </m:r>
+                      <m:r>
                         <a:rPr lang="en-PH" sz="2000" b="1" i="1" dirty="0" smtClean="0">
                           <a:solidFill>
                             <a:schemeClr val="tx1"/>
@@ -10142,7 +10151,7 @@
             </p:txBody>
           </p:sp>
         </mc:Choice>
-        <mc:Fallback xmlns="">
+        <mc:Fallback>
           <p:sp>
             <p:nvSpPr>
               <p:cNvPr id="67" name="TextBox 66">
@@ -10160,7 +10169,7 @@
             <p:spPr>
               <a:xfrm>
                 <a:off x="4862460" y="1846056"/>
-                <a:ext cx="1596448" cy="400110"/>
+                <a:ext cx="1772608" cy="400110"/>
               </a:xfrm>
               <a:prstGeom prst="rect">
                 <a:avLst/>
@@ -10168,7 +10177,7 @@
               <a:blipFill>
                 <a:blip r:embed="rId9"/>
                 <a:stretch>
-                  <a:fillRect l="-1145"/>
+                  <a:fillRect l="-714" b="-18750"/>
                 </a:stretch>
               </a:blipFill>
               <a:ln>
@@ -10180,7 +10189,7 @@
               <a:lstStyle/>
               <a:p>
                 <a:r>
-                  <a:rPr lang="en-PH">
+                  <a:rPr lang="en-US">
                     <a:noFill/>
                   </a:rPr>
                   <a:t> </a:t>
@@ -10484,8 +10493,8 @@
           </p:sp>
         </mc:Fallback>
       </mc:AlternateContent>
-      <mc:AlternateContent xmlns:mc="http://schemas.openxmlformats.org/markup-compatibility/2006" xmlns:a14="http://schemas.microsoft.com/office/drawing/2010/main">
-        <mc:Choice Requires="a14">
+      <mc:AlternateContent xmlns:mc="http://schemas.openxmlformats.org/markup-compatibility/2006">
+        <mc:Choice xmlns:a14="http://schemas.microsoft.com/office/drawing/2010/main" Requires="a14">
           <p:sp>
             <p:nvSpPr>
               <p:cNvPr id="104" name="TextBox 103">
@@ -10563,13 +10572,13 @@
                         <m:t>=</m:t>
                       </m:r>
                       <m:r>
-                        <a:rPr lang="en-PH" sz="2000" b="1" i="1" dirty="0" smtClean="0">
+                        <a:rPr lang="en-GB" sz="2000" b="1" i="1" dirty="0" smtClean="0">
                           <a:solidFill>
                             <a:schemeClr val="tx1"/>
                           </a:solidFill>
                           <a:latin typeface="Cambria Math" panose="02040503050406030204" pitchFamily="18" charset="0"/>
                         </a:rPr>
-                        <m:t>𝟔</m:t>
+                        <m:t>𝟐</m:t>
                       </m:r>
                     </m:oMath>
                   </m:oMathPara>
@@ -10583,7 +10592,7 @@
             </p:txBody>
           </p:sp>
         </mc:Choice>
-        <mc:Fallback xmlns="">
+        <mc:Fallback>
           <p:sp>
             <p:nvSpPr>
               <p:cNvPr id="104" name="TextBox 103">
@@ -10621,7 +10630,7 @@
               <a:lstStyle/>
               <a:p>
                 <a:r>
-                  <a:rPr lang="en-PH">
+                  <a:rPr lang="en-US">
                     <a:noFill/>
                   </a:rPr>
                   <a:t> </a:t>
@@ -22938,18 +22947,18 @@
 </file>
 
 <file path=customXml/item1.xml><?xml version="1.0" encoding="utf-8"?>
-<p:properties xmlns:p="http://schemas.microsoft.com/office/2006/metadata/properties" xmlns:xsi="http://www.w3.org/2001/XMLSchema-instance" xmlns:pc="http://schemas.microsoft.com/office/infopath/2007/PartnerControls">
-  <documentManagement/>
-</p:properties>
-</file>
-
-<file path=customXml/item2.xml><?xml version="1.0" encoding="utf-8"?>
 <?mso-contentType ?>
 <FormTemplates xmlns="http://schemas.microsoft.com/sharepoint/v3/contenttype/forms">
   <Display>DocumentLibraryForm</Display>
   <Edit>DocumentLibraryForm</Edit>
   <New>DocumentLibraryForm</New>
 </FormTemplates>
+</file>
+
+<file path=customXml/item2.xml><?xml version="1.0" encoding="utf-8"?>
+<p:properties xmlns:p="http://schemas.microsoft.com/office/2006/metadata/properties" xmlns:xsi="http://www.w3.org/2001/XMLSchema-instance" xmlns:pc="http://schemas.microsoft.com/office/infopath/2007/PartnerControls">
+  <documentManagement/>
+</p:properties>
 </file>
 
 <file path=customXml/item3.xml><?xml version="1.0" encoding="utf-8"?>
@@ -23085,18 +23094,18 @@
 </file>
 
 <file path=customXml/itemProps1.xml><?xml version="1.0" encoding="utf-8"?>
-<ds:datastoreItem xmlns:ds="http://schemas.openxmlformats.org/officeDocument/2006/customXml" ds:itemID="{857C6131-C561-4201-AE06-D21CDE528BF4}">
+<ds:datastoreItem xmlns:ds="http://schemas.openxmlformats.org/officeDocument/2006/customXml" ds:itemID="{C598EE6F-E26B-42BB-A8C4-ECA40997D302}">
   <ds:schemaRefs>
-    <ds:schemaRef ds:uri="http://schemas.microsoft.com/office/2006/metadata/properties"/>
-    <ds:schemaRef ds:uri="http://schemas.microsoft.com/office/infopath/2007/PartnerControls"/>
+    <ds:schemaRef ds:uri="http://schemas.microsoft.com/sharepoint/v3/contenttype/forms"/>
   </ds:schemaRefs>
 </ds:datastoreItem>
 </file>
 
 <file path=customXml/itemProps2.xml><?xml version="1.0" encoding="utf-8"?>
-<ds:datastoreItem xmlns:ds="http://schemas.openxmlformats.org/officeDocument/2006/customXml" ds:itemID="{C598EE6F-E26B-42BB-A8C4-ECA40997D302}">
+<ds:datastoreItem xmlns:ds="http://schemas.openxmlformats.org/officeDocument/2006/customXml" ds:itemID="{857C6131-C561-4201-AE06-D21CDE528BF4}">
   <ds:schemaRefs>
-    <ds:schemaRef ds:uri="http://schemas.microsoft.com/sharepoint/v3/contenttype/forms"/>
+    <ds:schemaRef ds:uri="http://schemas.microsoft.com/office/2006/metadata/properties"/>
+    <ds:schemaRef ds:uri="http://schemas.microsoft.com/office/infopath/2007/PartnerControls"/>
   </ds:schemaRefs>
 </ds:datastoreItem>
 </file>
